--- a/docs/slide.pptx
+++ b/docs/slide.pptx
@@ -34,6 +34,12 @@
   </p:sldIdLst>
   <p:sldSz cx="12191365" cy="6858000"/>
   <p:notesSz cx="6858000" cy="12191365"/>
+  <p:embeddedFontLst>
+    <p:embeddedFont>
+      <p:font typeface="SimSun" panose="02010600030101010101" pitchFamily="2" charset="-122"/>
+      <p:regular r:id="rId30"/>
+    </p:embeddedFont>
+  </p:embeddedFontLst>
   <p:defaultTextStyle>
     <a:lvl1pPr marL="0" algn="l" defTabSz="914400" rtl="0" eaLnBrk="1" latinLnBrk="0" hangingPunct="1">
       <a:defRPr sz="1800" kern="1200">
@@ -6833,7 +6839,7 @@
         </p:nvSpPr>
         <p:spPr>
           <a:xfrm>
-            <a:off x="609585" y="612648"/>
+            <a:off x="609585" y="170688"/>
             <a:ext cx="11582110" cy="274320"/>
           </a:xfrm>
           <a:prstGeom prst="rect">
@@ -6874,7 +6880,7 @@
         </p:nvSpPr>
         <p:spPr>
           <a:xfrm>
-            <a:off x="609585" y="914400"/>
+            <a:off x="609585" y="445135"/>
             <a:ext cx="10972800" cy="539686"/>
           </a:xfrm>
           <a:prstGeom prst="rect">
@@ -6907,2055 +6913,6 @@
           </a:p>
         </p:txBody>
       </p:sp>
-      <p:graphicFrame>
-        <p:nvGraphicFramePr>
-          <p:cNvPr id="17" name="Table 0"/>
-          <p:cNvGraphicFramePr>
-            <a:graphicFrameLocks noGrp="1"/>
-          </p:cNvGraphicFramePr>
-          <p:nvPr/>
-        </p:nvGraphicFramePr>
-        <p:xfrm>
-          <a:off x="609585" y="1728406"/>
-          <a:ext cx="10972800" cy="4114800"/>
-        </p:xfrm>
-        <a:graphic>
-          <a:graphicData uri="http://schemas.openxmlformats.org/drawingml/2006/table">
-            <a:tbl>
-              <a:tblPr/>
-              <a:tblGrid>
-                <a:gridCol w="2926080"/>
-                <a:gridCol w="2011680"/>
-                <a:gridCol w="2011680"/>
-                <a:gridCol w="2011680"/>
-                <a:gridCol w="2011680"/>
-              </a:tblGrid>
-              <a:tr h="685800">
-                <a:tc>
-                  <a:txBody>
-                    <a:bodyPr/>
-                    <a:lstStyle/>
-                    <a:p>
-                      <a:pPr marL="0" indent="0" algn="l">
-                        <a:buNone/>
-                      </a:pPr>
-                      <a:r>
-                        <a:rPr lang="en-US" sz="2000" b="1" dirty="0">
-                          <a:solidFill>
-                            <a:srgbClr val="FFFFFF"/>
-                          </a:solidFill>
-                          <a:latin typeface="Times New Roman" panose="02020603050405020304"/>
-                          <a:ea typeface="Times New Roman" panose="02020603050405020304"/>
-                          <a:cs typeface="Times New Roman" panose="02020603050405020304"/>
-                        </a:rPr>
-                        <a:t>Model</a:t>
-                      </a:r>
-                      <a:endParaRPr lang="en-US" sz="2000" dirty="0">
-                        <a:latin typeface="Times New Roman" panose="02020603050405020304"/>
-                        <a:ea typeface="Times New Roman" panose="02020603050405020304"/>
-                        <a:cs typeface="Times New Roman" panose="02020603050405020304"/>
-                      </a:endParaRPr>
-                    </a:p>
-                  </a:txBody>
-                  <a:tcPr marL="152396" marR="152396" marT="81278" marB="81278" anchor="ctr">
-                    <a:lnL w="12700" cap="flat" cmpd="sng" algn="ctr">
-                      <a:solidFill>
-                        <a:srgbClr val="CBD8E2"/>
-                      </a:solidFill>
-                      <a:prstDash val="solid"/>
-                      <a:round/>
-                      <a:headEnd type="none" w="med" len="med"/>
-                      <a:tailEnd type="none" w="med" len="med"/>
-                    </a:lnL>
-                    <a:lnR w="12700" cap="flat" cmpd="sng" algn="ctr">
-                      <a:solidFill>
-                        <a:srgbClr val="CBD8E2"/>
-                      </a:solidFill>
-                      <a:prstDash val="solid"/>
-                      <a:round/>
-                      <a:headEnd type="none" w="med" len="med"/>
-                      <a:tailEnd type="none" w="med" len="med"/>
-                    </a:lnR>
-                    <a:lnT w="12700" cap="flat" cmpd="sng" algn="ctr">
-                      <a:solidFill>
-                        <a:srgbClr val="CBD8E2"/>
-                      </a:solidFill>
-                      <a:prstDash val="solid"/>
-                      <a:round/>
-                      <a:headEnd type="none" w="med" len="med"/>
-                      <a:tailEnd type="none" w="med" len="med"/>
-                    </a:lnT>
-                    <a:lnB w="12700" cap="flat" cmpd="sng" algn="ctr">
-                      <a:solidFill>
-                        <a:srgbClr val="CBD8E2"/>
-                      </a:solidFill>
-                      <a:prstDash val="solid"/>
-                      <a:round/>
-                      <a:headEnd type="none" w="med" len="med"/>
-                      <a:tailEnd type="none" w="med" len="med"/>
-                    </a:lnB>
-                    <a:solidFill>
-                      <a:srgbClr val="1F4E79"/>
-                    </a:solidFill>
-                  </a:tcPr>
-                </a:tc>
-                <a:tc>
-                  <a:txBody>
-                    <a:bodyPr/>
-                    <a:lstStyle/>
-                    <a:p>
-                      <a:pPr marL="0" indent="0" algn="l">
-                        <a:buNone/>
-                      </a:pPr>
-                      <a:r>
-                        <a:rPr lang="en-US" sz="2000" b="1" dirty="0">
-                          <a:solidFill>
-                            <a:srgbClr val="FFFFFF"/>
-                          </a:solidFill>
-                          <a:latin typeface="Times New Roman" panose="02020603050405020304"/>
-                          <a:ea typeface="Times New Roman" panose="02020603050405020304"/>
-                          <a:cs typeface="Times New Roman" panose="02020603050405020304"/>
-                        </a:rPr>
-                        <a:t>MSE</a:t>
-                      </a:r>
-                      <a:endParaRPr lang="en-US" sz="2000" dirty="0">
-                        <a:latin typeface="Times New Roman" panose="02020603050405020304"/>
-                        <a:ea typeface="Times New Roman" panose="02020603050405020304"/>
-                        <a:cs typeface="Times New Roman" panose="02020603050405020304"/>
-                      </a:endParaRPr>
-                    </a:p>
-                  </a:txBody>
-                  <a:tcPr marL="152396" marR="152396" marT="81278" marB="81278" anchor="ctr">
-                    <a:lnL w="12700" cap="flat" cmpd="sng" algn="ctr">
-                      <a:solidFill>
-                        <a:srgbClr val="CBD8E2"/>
-                      </a:solidFill>
-                      <a:prstDash val="solid"/>
-                      <a:round/>
-                      <a:headEnd type="none" w="med" len="med"/>
-                      <a:tailEnd type="none" w="med" len="med"/>
-                    </a:lnL>
-                    <a:lnR w="12700" cap="flat" cmpd="sng" algn="ctr">
-                      <a:solidFill>
-                        <a:srgbClr val="CBD8E2"/>
-                      </a:solidFill>
-                      <a:prstDash val="solid"/>
-                      <a:round/>
-                      <a:headEnd type="none" w="med" len="med"/>
-                      <a:tailEnd type="none" w="med" len="med"/>
-                    </a:lnR>
-                    <a:lnT w="12700" cap="flat" cmpd="sng" algn="ctr">
-                      <a:solidFill>
-                        <a:srgbClr val="CBD8E2"/>
-                      </a:solidFill>
-                      <a:prstDash val="solid"/>
-                      <a:round/>
-                      <a:headEnd type="none" w="med" len="med"/>
-                      <a:tailEnd type="none" w="med" len="med"/>
-                    </a:lnT>
-                    <a:lnB w="12700" cap="flat" cmpd="sng" algn="ctr">
-                      <a:solidFill>
-                        <a:srgbClr val="CBD8E2"/>
-                      </a:solidFill>
-                      <a:prstDash val="solid"/>
-                      <a:round/>
-                      <a:headEnd type="none" w="med" len="med"/>
-                      <a:tailEnd type="none" w="med" len="med"/>
-                    </a:lnB>
-                    <a:solidFill>
-                      <a:srgbClr val="1F4E79"/>
-                    </a:solidFill>
-                  </a:tcPr>
-                </a:tc>
-                <a:tc>
-                  <a:txBody>
-                    <a:bodyPr/>
-                    <a:lstStyle/>
-                    <a:p>
-                      <a:pPr marL="0" indent="0" algn="l">
-                        <a:buNone/>
-                      </a:pPr>
-                      <a:r>
-                        <a:rPr lang="en-US" sz="2000" b="1" dirty="0">
-                          <a:solidFill>
-                            <a:srgbClr val="FFFFFF"/>
-                          </a:solidFill>
-                          <a:latin typeface="Times New Roman" panose="02020603050405020304"/>
-                          <a:ea typeface="Times New Roman" panose="02020603050405020304"/>
-                          <a:cs typeface="Times New Roman" panose="02020603050405020304"/>
-                        </a:rPr>
-                        <a:t>RMSE</a:t>
-                      </a:r>
-                      <a:endParaRPr lang="en-US" sz="2000" dirty="0">
-                        <a:latin typeface="Times New Roman" panose="02020603050405020304"/>
-                        <a:ea typeface="Times New Roman" panose="02020603050405020304"/>
-                        <a:cs typeface="Times New Roman" panose="02020603050405020304"/>
-                      </a:endParaRPr>
-                    </a:p>
-                  </a:txBody>
-                  <a:tcPr marL="152396" marR="152396" marT="81278" marB="81278" anchor="ctr">
-                    <a:lnL w="12700" cap="flat" cmpd="sng" algn="ctr">
-                      <a:solidFill>
-                        <a:srgbClr val="CBD8E2"/>
-                      </a:solidFill>
-                      <a:prstDash val="solid"/>
-                      <a:round/>
-                      <a:headEnd type="none" w="med" len="med"/>
-                      <a:tailEnd type="none" w="med" len="med"/>
-                    </a:lnL>
-                    <a:lnR w="12700" cap="flat" cmpd="sng" algn="ctr">
-                      <a:solidFill>
-                        <a:srgbClr val="CBD8E2"/>
-                      </a:solidFill>
-                      <a:prstDash val="solid"/>
-                      <a:round/>
-                      <a:headEnd type="none" w="med" len="med"/>
-                      <a:tailEnd type="none" w="med" len="med"/>
-                    </a:lnR>
-                    <a:lnT w="12700" cap="flat" cmpd="sng" algn="ctr">
-                      <a:solidFill>
-                        <a:srgbClr val="CBD8E2"/>
-                      </a:solidFill>
-                      <a:prstDash val="solid"/>
-                      <a:round/>
-                      <a:headEnd type="none" w="med" len="med"/>
-                      <a:tailEnd type="none" w="med" len="med"/>
-                    </a:lnT>
-                    <a:lnB w="12700" cap="flat" cmpd="sng" algn="ctr">
-                      <a:solidFill>
-                        <a:srgbClr val="CBD8E2"/>
-                      </a:solidFill>
-                      <a:prstDash val="solid"/>
-                      <a:round/>
-                      <a:headEnd type="none" w="med" len="med"/>
-                      <a:tailEnd type="none" w="med" len="med"/>
-                    </a:lnB>
-                    <a:solidFill>
-                      <a:srgbClr val="1F4E79"/>
-                    </a:solidFill>
-                  </a:tcPr>
-                </a:tc>
-                <a:tc>
-                  <a:txBody>
-                    <a:bodyPr/>
-                    <a:lstStyle/>
-                    <a:p>
-                      <a:pPr marL="0" indent="0" algn="l">
-                        <a:buNone/>
-                      </a:pPr>
-                      <a:r>
-                        <a:rPr lang="en-US" sz="2000" b="1" dirty="0">
-                          <a:solidFill>
-                            <a:srgbClr val="FFFFFF"/>
-                          </a:solidFill>
-                          <a:latin typeface="Times New Roman" panose="02020603050405020304"/>
-                          <a:ea typeface="Times New Roman" panose="02020603050405020304"/>
-                          <a:cs typeface="Times New Roman" panose="02020603050405020304"/>
-                        </a:rPr>
-                        <a:t>MAE</a:t>
-                      </a:r>
-                      <a:endParaRPr lang="en-US" sz="2000" dirty="0">
-                        <a:latin typeface="Times New Roman" panose="02020603050405020304"/>
-                        <a:ea typeface="Times New Roman" panose="02020603050405020304"/>
-                        <a:cs typeface="Times New Roman" panose="02020603050405020304"/>
-                      </a:endParaRPr>
-                    </a:p>
-                  </a:txBody>
-                  <a:tcPr marL="152396" marR="152396" marT="81278" marB="81278" anchor="ctr">
-                    <a:lnL w="12700" cap="flat" cmpd="sng" algn="ctr">
-                      <a:solidFill>
-                        <a:srgbClr val="CBD8E2"/>
-                      </a:solidFill>
-                      <a:prstDash val="solid"/>
-                      <a:round/>
-                      <a:headEnd type="none" w="med" len="med"/>
-                      <a:tailEnd type="none" w="med" len="med"/>
-                    </a:lnL>
-                    <a:lnR w="12700" cap="flat" cmpd="sng" algn="ctr">
-                      <a:solidFill>
-                        <a:srgbClr val="CBD8E2"/>
-                      </a:solidFill>
-                      <a:prstDash val="solid"/>
-                      <a:round/>
-                      <a:headEnd type="none" w="med" len="med"/>
-                      <a:tailEnd type="none" w="med" len="med"/>
-                    </a:lnR>
-                    <a:lnT w="12700" cap="flat" cmpd="sng" algn="ctr">
-                      <a:solidFill>
-                        <a:srgbClr val="CBD8E2"/>
-                      </a:solidFill>
-                      <a:prstDash val="solid"/>
-                      <a:round/>
-                      <a:headEnd type="none" w="med" len="med"/>
-                      <a:tailEnd type="none" w="med" len="med"/>
-                    </a:lnT>
-                    <a:lnB w="12700" cap="flat" cmpd="sng" algn="ctr">
-                      <a:solidFill>
-                        <a:srgbClr val="CBD8E2"/>
-                      </a:solidFill>
-                      <a:prstDash val="solid"/>
-                      <a:round/>
-                      <a:headEnd type="none" w="med" len="med"/>
-                      <a:tailEnd type="none" w="med" len="med"/>
-                    </a:lnB>
-                    <a:solidFill>
-                      <a:srgbClr val="1F4E79"/>
-                    </a:solidFill>
-                  </a:tcPr>
-                </a:tc>
-                <a:tc>
-                  <a:txBody>
-                    <a:bodyPr/>
-                    <a:lstStyle/>
-                    <a:p>
-                      <a:pPr marL="0" indent="0" algn="l">
-                        <a:buNone/>
-                      </a:pPr>
-                      <a:r>
-                        <a:rPr lang="en-US" sz="2000" b="1" dirty="0">
-                          <a:solidFill>
-                            <a:srgbClr val="FFFFFF"/>
-                          </a:solidFill>
-                          <a:latin typeface="Times New Roman" panose="02020603050405020304"/>
-                          <a:ea typeface="Times New Roman" panose="02020603050405020304"/>
-                          <a:cs typeface="Times New Roman" panose="02020603050405020304"/>
-                        </a:rPr>
-                        <a:t>R²</a:t>
-                      </a:r>
-                      <a:endParaRPr lang="en-US" sz="2000" dirty="0">
-                        <a:latin typeface="Times New Roman" panose="02020603050405020304"/>
-                        <a:ea typeface="Times New Roman" panose="02020603050405020304"/>
-                        <a:cs typeface="Times New Roman" panose="02020603050405020304"/>
-                      </a:endParaRPr>
-                    </a:p>
-                  </a:txBody>
-                  <a:tcPr marL="152396" marR="152396" marT="81278" marB="81278" anchor="ctr">
-                    <a:lnL w="12700" cap="flat" cmpd="sng" algn="ctr">
-                      <a:solidFill>
-                        <a:srgbClr val="CBD8E2"/>
-                      </a:solidFill>
-                      <a:prstDash val="solid"/>
-                      <a:round/>
-                      <a:headEnd type="none" w="med" len="med"/>
-                      <a:tailEnd type="none" w="med" len="med"/>
-                    </a:lnL>
-                    <a:lnR w="12700" cap="flat" cmpd="sng" algn="ctr">
-                      <a:solidFill>
-                        <a:srgbClr val="CBD8E2"/>
-                      </a:solidFill>
-                      <a:prstDash val="solid"/>
-                      <a:round/>
-                      <a:headEnd type="none" w="med" len="med"/>
-                      <a:tailEnd type="none" w="med" len="med"/>
-                    </a:lnR>
-                    <a:lnT w="12700" cap="flat" cmpd="sng" algn="ctr">
-                      <a:solidFill>
-                        <a:srgbClr val="CBD8E2"/>
-                      </a:solidFill>
-                      <a:prstDash val="solid"/>
-                      <a:round/>
-                      <a:headEnd type="none" w="med" len="med"/>
-                      <a:tailEnd type="none" w="med" len="med"/>
-                    </a:lnT>
-                    <a:lnB w="12700" cap="flat" cmpd="sng" algn="ctr">
-                      <a:solidFill>
-                        <a:srgbClr val="CBD8E2"/>
-                      </a:solidFill>
-                      <a:prstDash val="solid"/>
-                      <a:round/>
-                      <a:headEnd type="none" w="med" len="med"/>
-                      <a:tailEnd type="none" w="med" len="med"/>
-                    </a:lnB>
-                    <a:solidFill>
-                      <a:srgbClr val="1F4E79"/>
-                    </a:solidFill>
-                  </a:tcPr>
-                </a:tc>
-              </a:tr>
-              <a:tr h="685800">
-                <a:tc>
-                  <a:txBody>
-                    <a:bodyPr/>
-                    <a:lstStyle/>
-                    <a:p>
-                      <a:pPr marL="0" indent="0" algn="l">
-                        <a:buNone/>
-                      </a:pPr>
-                      <a:r>
-                        <a:rPr lang="en-US" sz="2000" b="1" dirty="0">
-                          <a:solidFill>
-                            <a:srgbClr val="222222"/>
-                          </a:solidFill>
-                          <a:latin typeface="Times New Roman" panose="02020603050405020304"/>
-                          <a:ea typeface="Times New Roman" panose="02020603050405020304"/>
-                          <a:cs typeface="Times New Roman" panose="02020603050405020304"/>
-                        </a:rPr>
-                        <a:t>Linear Regression</a:t>
-                      </a:r>
-                      <a:endParaRPr lang="en-US" sz="2000" dirty="0">
-                        <a:latin typeface="Times New Roman" panose="02020603050405020304"/>
-                        <a:ea typeface="Times New Roman" panose="02020603050405020304"/>
-                        <a:cs typeface="Times New Roman" panose="02020603050405020304"/>
-                      </a:endParaRPr>
-                    </a:p>
-                  </a:txBody>
-                  <a:tcPr marL="152396" marR="152396" marT="81278" marB="81278" anchor="ctr">
-                    <a:lnL w="12700" cap="flat" cmpd="sng" algn="ctr">
-                      <a:solidFill>
-                        <a:srgbClr val="CBD8E2"/>
-                      </a:solidFill>
-                      <a:prstDash val="solid"/>
-                      <a:round/>
-                      <a:headEnd type="none" w="med" len="med"/>
-                      <a:tailEnd type="none" w="med" len="med"/>
-                    </a:lnL>
-                    <a:lnR w="12700" cap="flat" cmpd="sng" algn="ctr">
-                      <a:solidFill>
-                        <a:srgbClr val="CBD8E2"/>
-                      </a:solidFill>
-                      <a:prstDash val="solid"/>
-                      <a:round/>
-                      <a:headEnd type="none" w="med" len="med"/>
-                      <a:tailEnd type="none" w="med" len="med"/>
-                    </a:lnR>
-                    <a:lnT w="12700" cap="flat" cmpd="sng" algn="ctr">
-                      <a:solidFill>
-                        <a:srgbClr val="CBD8E2"/>
-                      </a:solidFill>
-                      <a:prstDash val="solid"/>
-                      <a:round/>
-                      <a:headEnd type="none" w="med" len="med"/>
-                      <a:tailEnd type="none" w="med" len="med"/>
-                    </a:lnT>
-                    <a:lnB w="12700" cap="flat" cmpd="sng" algn="ctr">
-                      <a:solidFill>
-                        <a:srgbClr val="CBD8E2"/>
-                      </a:solidFill>
-                      <a:prstDash val="solid"/>
-                      <a:round/>
-                      <a:headEnd type="none" w="med" len="med"/>
-                      <a:tailEnd type="none" w="med" len="med"/>
-                    </a:lnB>
-                    <a:solidFill>
-                      <a:srgbClr val="DCE9F5"/>
-                    </a:solidFill>
-                  </a:tcPr>
-                </a:tc>
-                <a:tc>
-                  <a:txBody>
-                    <a:bodyPr/>
-                    <a:lstStyle/>
-                    <a:p>
-                      <a:pPr marL="0" indent="0" algn="l">
-                        <a:buNone/>
-                      </a:pPr>
-                      <a:r>
-                        <a:rPr lang="en-US" sz="2000" b="1" dirty="0">
-                          <a:solidFill>
-                            <a:srgbClr val="222222"/>
-                          </a:solidFill>
-                          <a:latin typeface="Times New Roman" panose="02020603050405020304"/>
-                          <a:ea typeface="Times New Roman" panose="02020603050405020304"/>
-                          <a:cs typeface="Times New Roman" panose="02020603050405020304"/>
-                        </a:rPr>
-                        <a:t>0.004617</a:t>
-                      </a:r>
-                      <a:endParaRPr lang="en-US" sz="2000" dirty="0">
-                        <a:latin typeface="Times New Roman" panose="02020603050405020304"/>
-                        <a:ea typeface="Times New Roman" panose="02020603050405020304"/>
-                        <a:cs typeface="Times New Roman" panose="02020603050405020304"/>
-                      </a:endParaRPr>
-                    </a:p>
-                  </a:txBody>
-                  <a:tcPr marL="152396" marR="152396" marT="81278" marB="81278" anchor="ctr">
-                    <a:lnL w="12700" cap="flat" cmpd="sng" algn="ctr">
-                      <a:solidFill>
-                        <a:srgbClr val="CBD8E2"/>
-                      </a:solidFill>
-                      <a:prstDash val="solid"/>
-                      <a:round/>
-                      <a:headEnd type="none" w="med" len="med"/>
-                      <a:tailEnd type="none" w="med" len="med"/>
-                    </a:lnL>
-                    <a:lnR w="12700" cap="flat" cmpd="sng" algn="ctr">
-                      <a:solidFill>
-                        <a:srgbClr val="CBD8E2"/>
-                      </a:solidFill>
-                      <a:prstDash val="solid"/>
-                      <a:round/>
-                      <a:headEnd type="none" w="med" len="med"/>
-                      <a:tailEnd type="none" w="med" len="med"/>
-                    </a:lnR>
-                    <a:lnT w="12700" cap="flat" cmpd="sng" algn="ctr">
-                      <a:solidFill>
-                        <a:srgbClr val="CBD8E2"/>
-                      </a:solidFill>
-                      <a:prstDash val="solid"/>
-                      <a:round/>
-                      <a:headEnd type="none" w="med" len="med"/>
-                      <a:tailEnd type="none" w="med" len="med"/>
-                    </a:lnT>
-                    <a:lnB w="12700" cap="flat" cmpd="sng" algn="ctr">
-                      <a:solidFill>
-                        <a:srgbClr val="CBD8E2"/>
-                      </a:solidFill>
-                      <a:prstDash val="solid"/>
-                      <a:round/>
-                      <a:headEnd type="none" w="med" len="med"/>
-                      <a:tailEnd type="none" w="med" len="med"/>
-                    </a:lnB>
-                    <a:solidFill>
-                      <a:srgbClr val="DCE9F5"/>
-                    </a:solidFill>
-                  </a:tcPr>
-                </a:tc>
-                <a:tc>
-                  <a:txBody>
-                    <a:bodyPr/>
-                    <a:lstStyle/>
-                    <a:p>
-                      <a:pPr marL="0" indent="0" algn="l">
-                        <a:buNone/>
-                      </a:pPr>
-                      <a:r>
-                        <a:rPr lang="en-US" sz="2000" b="1" dirty="0">
-                          <a:solidFill>
-                            <a:srgbClr val="222222"/>
-                          </a:solidFill>
-                          <a:latin typeface="Times New Roman" panose="02020603050405020304"/>
-                          <a:ea typeface="Times New Roman" panose="02020603050405020304"/>
-                          <a:cs typeface="Times New Roman" panose="02020603050405020304"/>
-                        </a:rPr>
-                        <a:t>0.067949</a:t>
-                      </a:r>
-                      <a:endParaRPr lang="en-US" sz="2000" dirty="0">
-                        <a:latin typeface="Times New Roman" panose="02020603050405020304"/>
-                        <a:ea typeface="Times New Roman" panose="02020603050405020304"/>
-                        <a:cs typeface="Times New Roman" panose="02020603050405020304"/>
-                      </a:endParaRPr>
-                    </a:p>
-                  </a:txBody>
-                  <a:tcPr marL="152396" marR="152396" marT="81278" marB="81278" anchor="ctr">
-                    <a:lnL w="12700" cap="flat" cmpd="sng" algn="ctr">
-                      <a:solidFill>
-                        <a:srgbClr val="CBD8E2"/>
-                      </a:solidFill>
-                      <a:prstDash val="solid"/>
-                      <a:round/>
-                      <a:headEnd type="none" w="med" len="med"/>
-                      <a:tailEnd type="none" w="med" len="med"/>
-                    </a:lnL>
-                    <a:lnR w="12700" cap="flat" cmpd="sng" algn="ctr">
-                      <a:solidFill>
-                        <a:srgbClr val="CBD8E2"/>
-                      </a:solidFill>
-                      <a:prstDash val="solid"/>
-                      <a:round/>
-                      <a:headEnd type="none" w="med" len="med"/>
-                      <a:tailEnd type="none" w="med" len="med"/>
-                    </a:lnR>
-                    <a:lnT w="12700" cap="flat" cmpd="sng" algn="ctr">
-                      <a:solidFill>
-                        <a:srgbClr val="CBD8E2"/>
-                      </a:solidFill>
-                      <a:prstDash val="solid"/>
-                      <a:round/>
-                      <a:headEnd type="none" w="med" len="med"/>
-                      <a:tailEnd type="none" w="med" len="med"/>
-                    </a:lnT>
-                    <a:lnB w="12700" cap="flat" cmpd="sng" algn="ctr">
-                      <a:solidFill>
-                        <a:srgbClr val="CBD8E2"/>
-                      </a:solidFill>
-                      <a:prstDash val="solid"/>
-                      <a:round/>
-                      <a:headEnd type="none" w="med" len="med"/>
-                      <a:tailEnd type="none" w="med" len="med"/>
-                    </a:lnB>
-                    <a:solidFill>
-                      <a:srgbClr val="DCE9F5"/>
-                    </a:solidFill>
-                  </a:tcPr>
-                </a:tc>
-                <a:tc>
-                  <a:txBody>
-                    <a:bodyPr/>
-                    <a:lstStyle/>
-                    <a:p>
-                      <a:pPr marL="0" indent="0" algn="l">
-                        <a:buNone/>
-                      </a:pPr>
-                      <a:r>
-                        <a:rPr lang="en-US" sz="2000" b="1" dirty="0">
-                          <a:solidFill>
-                            <a:srgbClr val="222222"/>
-                          </a:solidFill>
-                          <a:latin typeface="Times New Roman" panose="02020603050405020304"/>
-                          <a:ea typeface="Times New Roman" panose="02020603050405020304"/>
-                          <a:cs typeface="Times New Roman" panose="02020603050405020304"/>
-                        </a:rPr>
-                        <a:t>0.047957</a:t>
-                      </a:r>
-                      <a:endParaRPr lang="en-US" sz="2000" dirty="0">
-                        <a:latin typeface="Times New Roman" panose="02020603050405020304"/>
-                        <a:ea typeface="Times New Roman" panose="02020603050405020304"/>
-                        <a:cs typeface="Times New Roman" panose="02020603050405020304"/>
-                      </a:endParaRPr>
-                    </a:p>
-                  </a:txBody>
-                  <a:tcPr marL="152396" marR="152396" marT="81278" marB="81278" anchor="ctr">
-                    <a:lnL w="12700" cap="flat" cmpd="sng" algn="ctr">
-                      <a:solidFill>
-                        <a:srgbClr val="CBD8E2"/>
-                      </a:solidFill>
-                      <a:prstDash val="solid"/>
-                      <a:round/>
-                      <a:headEnd type="none" w="med" len="med"/>
-                      <a:tailEnd type="none" w="med" len="med"/>
-                    </a:lnL>
-                    <a:lnR w="12700" cap="flat" cmpd="sng" algn="ctr">
-                      <a:solidFill>
-                        <a:srgbClr val="CBD8E2"/>
-                      </a:solidFill>
-                      <a:prstDash val="solid"/>
-                      <a:round/>
-                      <a:headEnd type="none" w="med" len="med"/>
-                      <a:tailEnd type="none" w="med" len="med"/>
-                    </a:lnR>
-                    <a:lnT w="12700" cap="flat" cmpd="sng" algn="ctr">
-                      <a:solidFill>
-                        <a:srgbClr val="CBD8E2"/>
-                      </a:solidFill>
-                      <a:prstDash val="solid"/>
-                      <a:round/>
-                      <a:headEnd type="none" w="med" len="med"/>
-                      <a:tailEnd type="none" w="med" len="med"/>
-                    </a:lnT>
-                    <a:lnB w="12700" cap="flat" cmpd="sng" algn="ctr">
-                      <a:solidFill>
-                        <a:srgbClr val="CBD8E2"/>
-                      </a:solidFill>
-                      <a:prstDash val="solid"/>
-                      <a:round/>
-                      <a:headEnd type="none" w="med" len="med"/>
-                      <a:tailEnd type="none" w="med" len="med"/>
-                    </a:lnB>
-                    <a:solidFill>
-                      <a:srgbClr val="DCE9F5"/>
-                    </a:solidFill>
-                  </a:tcPr>
-                </a:tc>
-                <a:tc>
-                  <a:txBody>
-                    <a:bodyPr/>
-                    <a:lstStyle/>
-                    <a:p>
-                      <a:pPr marL="0" indent="0" algn="l">
-                        <a:buNone/>
-                      </a:pPr>
-                      <a:r>
-                        <a:rPr lang="en-US" sz="2000" b="1" dirty="0">
-                          <a:solidFill>
-                            <a:srgbClr val="222222"/>
-                          </a:solidFill>
-                          <a:latin typeface="Times New Roman" panose="02020603050405020304"/>
-                          <a:ea typeface="Times New Roman" panose="02020603050405020304"/>
-                          <a:cs typeface="Times New Roman" panose="02020603050405020304"/>
-                        </a:rPr>
-                        <a:t>0.821208</a:t>
-                      </a:r>
-                      <a:endParaRPr lang="en-US" sz="2000" dirty="0">
-                        <a:latin typeface="Times New Roman" panose="02020603050405020304"/>
-                        <a:ea typeface="Times New Roman" panose="02020603050405020304"/>
-                        <a:cs typeface="Times New Roman" panose="02020603050405020304"/>
-                      </a:endParaRPr>
-                    </a:p>
-                  </a:txBody>
-                  <a:tcPr marL="152396" marR="152396" marT="81278" marB="81278" anchor="ctr">
-                    <a:lnL w="12700" cap="flat" cmpd="sng" algn="ctr">
-                      <a:solidFill>
-                        <a:srgbClr val="CBD8E2"/>
-                      </a:solidFill>
-                      <a:prstDash val="solid"/>
-                      <a:round/>
-                      <a:headEnd type="none" w="med" len="med"/>
-                      <a:tailEnd type="none" w="med" len="med"/>
-                    </a:lnL>
-                    <a:lnR w="12700" cap="flat" cmpd="sng" algn="ctr">
-                      <a:solidFill>
-                        <a:srgbClr val="CBD8E2"/>
-                      </a:solidFill>
-                      <a:prstDash val="solid"/>
-                      <a:round/>
-                      <a:headEnd type="none" w="med" len="med"/>
-                      <a:tailEnd type="none" w="med" len="med"/>
-                    </a:lnR>
-                    <a:lnT w="12700" cap="flat" cmpd="sng" algn="ctr">
-                      <a:solidFill>
-                        <a:srgbClr val="CBD8E2"/>
-                      </a:solidFill>
-                      <a:prstDash val="solid"/>
-                      <a:round/>
-                      <a:headEnd type="none" w="med" len="med"/>
-                      <a:tailEnd type="none" w="med" len="med"/>
-                    </a:lnT>
-                    <a:lnB w="12700" cap="flat" cmpd="sng" algn="ctr">
-                      <a:solidFill>
-                        <a:srgbClr val="CBD8E2"/>
-                      </a:solidFill>
-                      <a:prstDash val="solid"/>
-                      <a:round/>
-                      <a:headEnd type="none" w="med" len="med"/>
-                      <a:tailEnd type="none" w="med" len="med"/>
-                    </a:lnB>
-                    <a:solidFill>
-                      <a:srgbClr val="DCE9F5"/>
-                    </a:solidFill>
-                  </a:tcPr>
-                </a:tc>
-              </a:tr>
-              <a:tr h="685800">
-                <a:tc>
-                  <a:txBody>
-                    <a:bodyPr/>
-                    <a:lstStyle/>
-                    <a:p>
-                      <a:pPr marL="0" indent="0" algn="l">
-                        <a:buNone/>
-                      </a:pPr>
-                      <a:r>
-                        <a:rPr lang="en-US" sz="2000" dirty="0">
-                          <a:solidFill>
-                            <a:srgbClr val="222222"/>
-                          </a:solidFill>
-                          <a:latin typeface="Times New Roman" panose="02020603050405020304"/>
-                          <a:ea typeface="Times New Roman" panose="02020603050405020304"/>
-                          <a:cs typeface="Times New Roman" panose="02020603050405020304"/>
-                        </a:rPr>
-                        <a:t>Random Forest</a:t>
-                      </a:r>
-                      <a:endParaRPr lang="en-US" sz="2000" dirty="0">
-                        <a:latin typeface="Times New Roman" panose="02020603050405020304"/>
-                        <a:ea typeface="Times New Roman" panose="02020603050405020304"/>
-                        <a:cs typeface="Times New Roman" panose="02020603050405020304"/>
-                      </a:endParaRPr>
-                    </a:p>
-                  </a:txBody>
-                  <a:tcPr marL="152396" marR="152396" marT="81278" marB="81278" anchor="ctr">
-                    <a:lnL w="12700" cap="flat" cmpd="sng" algn="ctr">
-                      <a:solidFill>
-                        <a:srgbClr val="CBD8E2"/>
-                      </a:solidFill>
-                      <a:prstDash val="solid"/>
-                      <a:round/>
-                      <a:headEnd type="none" w="med" len="med"/>
-                      <a:tailEnd type="none" w="med" len="med"/>
-                    </a:lnL>
-                    <a:lnR w="12700" cap="flat" cmpd="sng" algn="ctr">
-                      <a:solidFill>
-                        <a:srgbClr val="CBD8E2"/>
-                      </a:solidFill>
-                      <a:prstDash val="solid"/>
-                      <a:round/>
-                      <a:headEnd type="none" w="med" len="med"/>
-                      <a:tailEnd type="none" w="med" len="med"/>
-                    </a:lnR>
-                    <a:lnT w="12700" cap="flat" cmpd="sng" algn="ctr">
-                      <a:solidFill>
-                        <a:srgbClr val="CBD8E2"/>
-                      </a:solidFill>
-                      <a:prstDash val="solid"/>
-                      <a:round/>
-                      <a:headEnd type="none" w="med" len="med"/>
-                      <a:tailEnd type="none" w="med" len="med"/>
-                    </a:lnT>
-                    <a:lnB w="12700" cap="flat" cmpd="sng" algn="ctr">
-                      <a:solidFill>
-                        <a:srgbClr val="CBD8E2"/>
-                      </a:solidFill>
-                      <a:prstDash val="solid"/>
-                      <a:round/>
-                      <a:headEnd type="none" w="med" len="med"/>
-                      <a:tailEnd type="none" w="med" len="med"/>
-                    </a:lnB>
-                    <a:solidFill>
-                      <a:srgbClr val="F3F7FB"/>
-                    </a:solidFill>
-                  </a:tcPr>
-                </a:tc>
-                <a:tc>
-                  <a:txBody>
-                    <a:bodyPr/>
-                    <a:lstStyle/>
-                    <a:p>
-                      <a:pPr marL="0" indent="0" algn="l">
-                        <a:buNone/>
-                      </a:pPr>
-                      <a:r>
-                        <a:rPr lang="en-US" sz="2000" dirty="0">
-                          <a:solidFill>
-                            <a:srgbClr val="222222"/>
-                          </a:solidFill>
-                          <a:latin typeface="Times New Roman" panose="02020603050405020304"/>
-                          <a:ea typeface="Times New Roman" panose="02020603050405020304"/>
-                          <a:cs typeface="Times New Roman" panose="02020603050405020304"/>
-                        </a:rPr>
-                        <a:t>0.004994</a:t>
-                      </a:r>
-                      <a:endParaRPr lang="en-US" sz="2000" dirty="0">
-                        <a:latin typeface="Times New Roman" panose="02020603050405020304"/>
-                        <a:ea typeface="Times New Roman" panose="02020603050405020304"/>
-                        <a:cs typeface="Times New Roman" panose="02020603050405020304"/>
-                      </a:endParaRPr>
-                    </a:p>
-                  </a:txBody>
-                  <a:tcPr marL="152396" marR="152396" marT="81278" marB="81278" anchor="ctr">
-                    <a:lnL w="12700" cap="flat" cmpd="sng" algn="ctr">
-                      <a:solidFill>
-                        <a:srgbClr val="CBD8E2"/>
-                      </a:solidFill>
-                      <a:prstDash val="solid"/>
-                      <a:round/>
-                      <a:headEnd type="none" w="med" len="med"/>
-                      <a:tailEnd type="none" w="med" len="med"/>
-                    </a:lnL>
-                    <a:lnR w="12700" cap="flat" cmpd="sng" algn="ctr">
-                      <a:solidFill>
-                        <a:srgbClr val="CBD8E2"/>
-                      </a:solidFill>
-                      <a:prstDash val="solid"/>
-                      <a:round/>
-                      <a:headEnd type="none" w="med" len="med"/>
-                      <a:tailEnd type="none" w="med" len="med"/>
-                    </a:lnR>
-                    <a:lnT w="12700" cap="flat" cmpd="sng" algn="ctr">
-                      <a:solidFill>
-                        <a:srgbClr val="CBD8E2"/>
-                      </a:solidFill>
-                      <a:prstDash val="solid"/>
-                      <a:round/>
-                      <a:headEnd type="none" w="med" len="med"/>
-                      <a:tailEnd type="none" w="med" len="med"/>
-                    </a:lnT>
-                    <a:lnB w="12700" cap="flat" cmpd="sng" algn="ctr">
-                      <a:solidFill>
-                        <a:srgbClr val="CBD8E2"/>
-                      </a:solidFill>
-                      <a:prstDash val="solid"/>
-                      <a:round/>
-                      <a:headEnd type="none" w="med" len="med"/>
-                      <a:tailEnd type="none" w="med" len="med"/>
-                    </a:lnB>
-                    <a:solidFill>
-                      <a:srgbClr val="F3F7FB"/>
-                    </a:solidFill>
-                  </a:tcPr>
-                </a:tc>
-                <a:tc>
-                  <a:txBody>
-                    <a:bodyPr/>
-                    <a:lstStyle/>
-                    <a:p>
-                      <a:pPr marL="0" indent="0" algn="l">
-                        <a:buNone/>
-                      </a:pPr>
-                      <a:r>
-                        <a:rPr lang="en-US" sz="2000" dirty="0">
-                          <a:solidFill>
-                            <a:srgbClr val="222222"/>
-                          </a:solidFill>
-                          <a:latin typeface="Times New Roman" panose="02020603050405020304"/>
-                          <a:ea typeface="Times New Roman" panose="02020603050405020304"/>
-                          <a:cs typeface="Times New Roman" panose="02020603050405020304"/>
-                        </a:rPr>
-                        <a:t>0.070669</a:t>
-                      </a:r>
-                      <a:endParaRPr lang="en-US" sz="2000" dirty="0">
-                        <a:latin typeface="Times New Roman" panose="02020603050405020304"/>
-                        <a:ea typeface="Times New Roman" panose="02020603050405020304"/>
-                        <a:cs typeface="Times New Roman" panose="02020603050405020304"/>
-                      </a:endParaRPr>
-                    </a:p>
-                  </a:txBody>
-                  <a:tcPr marL="152396" marR="152396" marT="81278" marB="81278" anchor="ctr">
-                    <a:lnL w="12700" cap="flat" cmpd="sng" algn="ctr">
-                      <a:solidFill>
-                        <a:srgbClr val="CBD8E2"/>
-                      </a:solidFill>
-                      <a:prstDash val="solid"/>
-                      <a:round/>
-                      <a:headEnd type="none" w="med" len="med"/>
-                      <a:tailEnd type="none" w="med" len="med"/>
-                    </a:lnL>
-                    <a:lnR w="12700" cap="flat" cmpd="sng" algn="ctr">
-                      <a:solidFill>
-                        <a:srgbClr val="CBD8E2"/>
-                      </a:solidFill>
-                      <a:prstDash val="solid"/>
-                      <a:round/>
-                      <a:headEnd type="none" w="med" len="med"/>
-                      <a:tailEnd type="none" w="med" len="med"/>
-                    </a:lnR>
-                    <a:lnT w="12700" cap="flat" cmpd="sng" algn="ctr">
-                      <a:solidFill>
-                        <a:srgbClr val="CBD8E2"/>
-                      </a:solidFill>
-                      <a:prstDash val="solid"/>
-                      <a:round/>
-                      <a:headEnd type="none" w="med" len="med"/>
-                      <a:tailEnd type="none" w="med" len="med"/>
-                    </a:lnT>
-                    <a:lnB w="12700" cap="flat" cmpd="sng" algn="ctr">
-                      <a:solidFill>
-                        <a:srgbClr val="CBD8E2"/>
-                      </a:solidFill>
-                      <a:prstDash val="solid"/>
-                      <a:round/>
-                      <a:headEnd type="none" w="med" len="med"/>
-                      <a:tailEnd type="none" w="med" len="med"/>
-                    </a:lnB>
-                    <a:solidFill>
-                      <a:srgbClr val="F3F7FB"/>
-                    </a:solidFill>
-                  </a:tcPr>
-                </a:tc>
-                <a:tc>
-                  <a:txBody>
-                    <a:bodyPr/>
-                    <a:lstStyle/>
-                    <a:p>
-                      <a:pPr marL="0" indent="0" algn="l">
-                        <a:buNone/>
-                      </a:pPr>
-                      <a:r>
-                        <a:rPr lang="en-US" sz="2000" dirty="0">
-                          <a:solidFill>
-                            <a:srgbClr val="222222"/>
-                          </a:solidFill>
-                          <a:latin typeface="Times New Roman" panose="02020603050405020304"/>
-                          <a:ea typeface="Times New Roman" panose="02020603050405020304"/>
-                          <a:cs typeface="Times New Roman" panose="02020603050405020304"/>
-                        </a:rPr>
-                        <a:t>0.049775</a:t>
-                      </a:r>
-                      <a:endParaRPr lang="en-US" sz="2000" dirty="0">
-                        <a:latin typeface="Times New Roman" panose="02020603050405020304"/>
-                        <a:ea typeface="Times New Roman" panose="02020603050405020304"/>
-                        <a:cs typeface="Times New Roman" panose="02020603050405020304"/>
-                      </a:endParaRPr>
-                    </a:p>
-                  </a:txBody>
-                  <a:tcPr marL="152396" marR="152396" marT="81278" marB="81278" anchor="ctr">
-                    <a:lnL w="12700" cap="flat" cmpd="sng" algn="ctr">
-                      <a:solidFill>
-                        <a:srgbClr val="CBD8E2"/>
-                      </a:solidFill>
-                      <a:prstDash val="solid"/>
-                      <a:round/>
-                      <a:headEnd type="none" w="med" len="med"/>
-                      <a:tailEnd type="none" w="med" len="med"/>
-                    </a:lnL>
-                    <a:lnR w="12700" cap="flat" cmpd="sng" algn="ctr">
-                      <a:solidFill>
-                        <a:srgbClr val="CBD8E2"/>
-                      </a:solidFill>
-                      <a:prstDash val="solid"/>
-                      <a:round/>
-                      <a:headEnd type="none" w="med" len="med"/>
-                      <a:tailEnd type="none" w="med" len="med"/>
-                    </a:lnR>
-                    <a:lnT w="12700" cap="flat" cmpd="sng" algn="ctr">
-                      <a:solidFill>
-                        <a:srgbClr val="CBD8E2"/>
-                      </a:solidFill>
-                      <a:prstDash val="solid"/>
-                      <a:round/>
-                      <a:headEnd type="none" w="med" len="med"/>
-                      <a:tailEnd type="none" w="med" len="med"/>
-                    </a:lnT>
-                    <a:lnB w="12700" cap="flat" cmpd="sng" algn="ctr">
-                      <a:solidFill>
-                        <a:srgbClr val="CBD8E2"/>
-                      </a:solidFill>
-                      <a:prstDash val="solid"/>
-                      <a:round/>
-                      <a:headEnd type="none" w="med" len="med"/>
-                      <a:tailEnd type="none" w="med" len="med"/>
-                    </a:lnB>
-                    <a:solidFill>
-                      <a:srgbClr val="F3F7FB"/>
-                    </a:solidFill>
-                  </a:tcPr>
-                </a:tc>
-                <a:tc>
-                  <a:txBody>
-                    <a:bodyPr/>
-                    <a:lstStyle/>
-                    <a:p>
-                      <a:pPr marL="0" indent="0" algn="l">
-                        <a:buNone/>
-                      </a:pPr>
-                      <a:r>
-                        <a:rPr lang="en-US" sz="2000" dirty="0">
-                          <a:solidFill>
-                            <a:srgbClr val="222222"/>
-                          </a:solidFill>
-                          <a:latin typeface="Times New Roman" panose="02020603050405020304"/>
-                          <a:ea typeface="Times New Roman" panose="02020603050405020304"/>
-                          <a:cs typeface="Times New Roman" panose="02020603050405020304"/>
-                        </a:rPr>
-                        <a:t>0.806608</a:t>
-                      </a:r>
-                      <a:endParaRPr lang="en-US" sz="2000" dirty="0">
-                        <a:latin typeface="Times New Roman" panose="02020603050405020304"/>
-                        <a:ea typeface="Times New Roman" panose="02020603050405020304"/>
-                        <a:cs typeface="Times New Roman" panose="02020603050405020304"/>
-                      </a:endParaRPr>
-                    </a:p>
-                  </a:txBody>
-                  <a:tcPr marL="152396" marR="152396" marT="81278" marB="81278" anchor="ctr">
-                    <a:lnL w="12700" cap="flat" cmpd="sng" algn="ctr">
-                      <a:solidFill>
-                        <a:srgbClr val="CBD8E2"/>
-                      </a:solidFill>
-                      <a:prstDash val="solid"/>
-                      <a:round/>
-                      <a:headEnd type="none" w="med" len="med"/>
-                      <a:tailEnd type="none" w="med" len="med"/>
-                    </a:lnL>
-                    <a:lnR w="12700" cap="flat" cmpd="sng" algn="ctr">
-                      <a:solidFill>
-                        <a:srgbClr val="CBD8E2"/>
-                      </a:solidFill>
-                      <a:prstDash val="solid"/>
-                      <a:round/>
-                      <a:headEnd type="none" w="med" len="med"/>
-                      <a:tailEnd type="none" w="med" len="med"/>
-                    </a:lnR>
-                    <a:lnT w="12700" cap="flat" cmpd="sng" algn="ctr">
-                      <a:solidFill>
-                        <a:srgbClr val="CBD8E2"/>
-                      </a:solidFill>
-                      <a:prstDash val="solid"/>
-                      <a:round/>
-                      <a:headEnd type="none" w="med" len="med"/>
-                      <a:tailEnd type="none" w="med" len="med"/>
-                    </a:lnT>
-                    <a:lnB w="12700" cap="flat" cmpd="sng" algn="ctr">
-                      <a:solidFill>
-                        <a:srgbClr val="CBD8E2"/>
-                      </a:solidFill>
-                      <a:prstDash val="solid"/>
-                      <a:round/>
-                      <a:headEnd type="none" w="med" len="med"/>
-                      <a:tailEnd type="none" w="med" len="med"/>
-                    </a:lnB>
-                    <a:solidFill>
-                      <a:srgbClr val="F3F7FB"/>
-                    </a:solidFill>
-                  </a:tcPr>
-                </a:tc>
-              </a:tr>
-              <a:tr h="685800">
-                <a:tc>
-                  <a:txBody>
-                    <a:bodyPr/>
-                    <a:lstStyle/>
-                    <a:p>
-                      <a:pPr marL="0" indent="0" algn="l">
-                        <a:buNone/>
-                      </a:pPr>
-                      <a:r>
-                        <a:rPr lang="en-US" sz="2000" dirty="0">
-                          <a:solidFill>
-                            <a:srgbClr val="222222"/>
-                          </a:solidFill>
-                          <a:latin typeface="Times New Roman" panose="02020603050405020304"/>
-                          <a:ea typeface="Times New Roman" panose="02020603050405020304"/>
-                          <a:cs typeface="Times New Roman" panose="02020603050405020304"/>
-                        </a:rPr>
-                        <a:t>Gradient Boosting</a:t>
-                      </a:r>
-                      <a:endParaRPr lang="en-US" sz="2000" dirty="0">
-                        <a:latin typeface="Times New Roman" panose="02020603050405020304"/>
-                        <a:ea typeface="Times New Roman" panose="02020603050405020304"/>
-                        <a:cs typeface="Times New Roman" panose="02020603050405020304"/>
-                      </a:endParaRPr>
-                    </a:p>
-                  </a:txBody>
-                  <a:tcPr marL="152396" marR="152396" marT="81278" marB="81278" anchor="ctr">
-                    <a:lnL w="12700" cap="flat" cmpd="sng" algn="ctr">
-                      <a:solidFill>
-                        <a:srgbClr val="CBD8E2"/>
-                      </a:solidFill>
-                      <a:prstDash val="solid"/>
-                      <a:round/>
-                      <a:headEnd type="none" w="med" len="med"/>
-                      <a:tailEnd type="none" w="med" len="med"/>
-                    </a:lnL>
-                    <a:lnR w="12700" cap="flat" cmpd="sng" algn="ctr">
-                      <a:solidFill>
-                        <a:srgbClr val="CBD8E2"/>
-                      </a:solidFill>
-                      <a:prstDash val="solid"/>
-                      <a:round/>
-                      <a:headEnd type="none" w="med" len="med"/>
-                      <a:tailEnd type="none" w="med" len="med"/>
-                    </a:lnR>
-                    <a:lnT w="12700" cap="flat" cmpd="sng" algn="ctr">
-                      <a:solidFill>
-                        <a:srgbClr val="CBD8E2"/>
-                      </a:solidFill>
-                      <a:prstDash val="solid"/>
-                      <a:round/>
-                      <a:headEnd type="none" w="med" len="med"/>
-                      <a:tailEnd type="none" w="med" len="med"/>
-                    </a:lnT>
-                    <a:lnB w="12700" cap="flat" cmpd="sng" algn="ctr">
-                      <a:solidFill>
-                        <a:srgbClr val="CBD8E2"/>
-                      </a:solidFill>
-                      <a:prstDash val="solid"/>
-                      <a:round/>
-                      <a:headEnd type="none" w="med" len="med"/>
-                      <a:tailEnd type="none" w="med" len="med"/>
-                    </a:lnB>
-                  </a:tcPr>
-                </a:tc>
-                <a:tc>
-                  <a:txBody>
-                    <a:bodyPr/>
-                    <a:lstStyle/>
-                    <a:p>
-                      <a:pPr marL="0" indent="0" algn="l">
-                        <a:buNone/>
-                      </a:pPr>
-                      <a:r>
-                        <a:rPr lang="en-US" sz="2000" dirty="0">
-                          <a:solidFill>
-                            <a:srgbClr val="222222"/>
-                          </a:solidFill>
-                          <a:latin typeface="Times New Roman" panose="02020603050405020304"/>
-                          <a:ea typeface="Times New Roman" panose="02020603050405020304"/>
-                          <a:cs typeface="Times New Roman" panose="02020603050405020304"/>
-                        </a:rPr>
-                        <a:t>0.005281</a:t>
-                      </a:r>
-                      <a:endParaRPr lang="en-US" sz="2000" dirty="0">
-                        <a:latin typeface="Times New Roman" panose="02020603050405020304"/>
-                        <a:ea typeface="Times New Roman" panose="02020603050405020304"/>
-                        <a:cs typeface="Times New Roman" panose="02020603050405020304"/>
-                      </a:endParaRPr>
-                    </a:p>
-                  </a:txBody>
-                  <a:tcPr marL="152396" marR="152396" marT="81278" marB="81278" anchor="ctr">
-                    <a:lnL w="12700" cap="flat" cmpd="sng" algn="ctr">
-                      <a:solidFill>
-                        <a:srgbClr val="CBD8E2"/>
-                      </a:solidFill>
-                      <a:prstDash val="solid"/>
-                      <a:round/>
-                      <a:headEnd type="none" w="med" len="med"/>
-                      <a:tailEnd type="none" w="med" len="med"/>
-                    </a:lnL>
-                    <a:lnR w="12700" cap="flat" cmpd="sng" algn="ctr">
-                      <a:solidFill>
-                        <a:srgbClr val="CBD8E2"/>
-                      </a:solidFill>
-                      <a:prstDash val="solid"/>
-                      <a:round/>
-                      <a:headEnd type="none" w="med" len="med"/>
-                      <a:tailEnd type="none" w="med" len="med"/>
-                    </a:lnR>
-                    <a:lnT w="12700" cap="flat" cmpd="sng" algn="ctr">
-                      <a:solidFill>
-                        <a:srgbClr val="CBD8E2"/>
-                      </a:solidFill>
-                      <a:prstDash val="solid"/>
-                      <a:round/>
-                      <a:headEnd type="none" w="med" len="med"/>
-                      <a:tailEnd type="none" w="med" len="med"/>
-                    </a:lnT>
-                    <a:lnB w="12700" cap="flat" cmpd="sng" algn="ctr">
-                      <a:solidFill>
-                        <a:srgbClr val="CBD8E2"/>
-                      </a:solidFill>
-                      <a:prstDash val="solid"/>
-                      <a:round/>
-                      <a:headEnd type="none" w="med" len="med"/>
-                      <a:tailEnd type="none" w="med" len="med"/>
-                    </a:lnB>
-                  </a:tcPr>
-                </a:tc>
-                <a:tc>
-                  <a:txBody>
-                    <a:bodyPr/>
-                    <a:lstStyle/>
-                    <a:p>
-                      <a:pPr marL="0" indent="0" algn="l">
-                        <a:buNone/>
-                      </a:pPr>
-                      <a:r>
-                        <a:rPr lang="en-US" sz="2000" dirty="0">
-                          <a:solidFill>
-                            <a:srgbClr val="222222"/>
-                          </a:solidFill>
-                          <a:latin typeface="Times New Roman" panose="02020603050405020304"/>
-                          <a:ea typeface="Times New Roman" panose="02020603050405020304"/>
-                          <a:cs typeface="Times New Roman" panose="02020603050405020304"/>
-                        </a:rPr>
-                        <a:t>0.072669</a:t>
-                      </a:r>
-                      <a:endParaRPr lang="en-US" sz="2000" dirty="0">
-                        <a:latin typeface="Times New Roman" panose="02020603050405020304"/>
-                        <a:ea typeface="Times New Roman" panose="02020603050405020304"/>
-                        <a:cs typeface="Times New Roman" panose="02020603050405020304"/>
-                      </a:endParaRPr>
-                    </a:p>
-                  </a:txBody>
-                  <a:tcPr marL="152396" marR="152396" marT="81278" marB="81278" anchor="ctr">
-                    <a:lnL w="12700" cap="flat" cmpd="sng" algn="ctr">
-                      <a:solidFill>
-                        <a:srgbClr val="CBD8E2"/>
-                      </a:solidFill>
-                      <a:prstDash val="solid"/>
-                      <a:round/>
-                      <a:headEnd type="none" w="med" len="med"/>
-                      <a:tailEnd type="none" w="med" len="med"/>
-                    </a:lnL>
-                    <a:lnR w="12700" cap="flat" cmpd="sng" algn="ctr">
-                      <a:solidFill>
-                        <a:srgbClr val="CBD8E2"/>
-                      </a:solidFill>
-                      <a:prstDash val="solid"/>
-                      <a:round/>
-                      <a:headEnd type="none" w="med" len="med"/>
-                      <a:tailEnd type="none" w="med" len="med"/>
-                    </a:lnR>
-                    <a:lnT w="12700" cap="flat" cmpd="sng" algn="ctr">
-                      <a:solidFill>
-                        <a:srgbClr val="CBD8E2"/>
-                      </a:solidFill>
-                      <a:prstDash val="solid"/>
-                      <a:round/>
-                      <a:headEnd type="none" w="med" len="med"/>
-                      <a:tailEnd type="none" w="med" len="med"/>
-                    </a:lnT>
-                    <a:lnB w="12700" cap="flat" cmpd="sng" algn="ctr">
-                      <a:solidFill>
-                        <a:srgbClr val="CBD8E2"/>
-                      </a:solidFill>
-                      <a:prstDash val="solid"/>
-                      <a:round/>
-                      <a:headEnd type="none" w="med" len="med"/>
-                      <a:tailEnd type="none" w="med" len="med"/>
-                    </a:lnB>
-                  </a:tcPr>
-                </a:tc>
-                <a:tc>
-                  <a:txBody>
-                    <a:bodyPr/>
-                    <a:lstStyle/>
-                    <a:p>
-                      <a:pPr marL="0" indent="0" algn="l">
-                        <a:buNone/>
-                      </a:pPr>
-                      <a:r>
-                        <a:rPr lang="en-US" sz="2000" dirty="0">
-                          <a:solidFill>
-                            <a:srgbClr val="222222"/>
-                          </a:solidFill>
-                          <a:latin typeface="Times New Roman" panose="02020603050405020304"/>
-                          <a:ea typeface="Times New Roman" panose="02020603050405020304"/>
-                          <a:cs typeface="Times New Roman" panose="02020603050405020304"/>
-                        </a:rPr>
-                        <a:t>0.050174</a:t>
-                      </a:r>
-                      <a:endParaRPr lang="en-US" sz="2000" dirty="0">
-                        <a:latin typeface="Times New Roman" panose="02020603050405020304"/>
-                        <a:ea typeface="Times New Roman" panose="02020603050405020304"/>
-                        <a:cs typeface="Times New Roman" panose="02020603050405020304"/>
-                      </a:endParaRPr>
-                    </a:p>
-                  </a:txBody>
-                  <a:tcPr marL="152396" marR="152396" marT="81278" marB="81278" anchor="ctr">
-                    <a:lnL w="12700" cap="flat" cmpd="sng" algn="ctr">
-                      <a:solidFill>
-                        <a:srgbClr val="CBD8E2"/>
-                      </a:solidFill>
-                      <a:prstDash val="solid"/>
-                      <a:round/>
-                      <a:headEnd type="none" w="med" len="med"/>
-                      <a:tailEnd type="none" w="med" len="med"/>
-                    </a:lnL>
-                    <a:lnR w="12700" cap="flat" cmpd="sng" algn="ctr">
-                      <a:solidFill>
-                        <a:srgbClr val="CBD8E2"/>
-                      </a:solidFill>
-                      <a:prstDash val="solid"/>
-                      <a:round/>
-                      <a:headEnd type="none" w="med" len="med"/>
-                      <a:tailEnd type="none" w="med" len="med"/>
-                    </a:lnR>
-                    <a:lnT w="12700" cap="flat" cmpd="sng" algn="ctr">
-                      <a:solidFill>
-                        <a:srgbClr val="CBD8E2"/>
-                      </a:solidFill>
-                      <a:prstDash val="solid"/>
-                      <a:round/>
-                      <a:headEnd type="none" w="med" len="med"/>
-                      <a:tailEnd type="none" w="med" len="med"/>
-                    </a:lnT>
-                    <a:lnB w="12700" cap="flat" cmpd="sng" algn="ctr">
-                      <a:solidFill>
-                        <a:srgbClr val="CBD8E2"/>
-                      </a:solidFill>
-                      <a:prstDash val="solid"/>
-                      <a:round/>
-                      <a:headEnd type="none" w="med" len="med"/>
-                      <a:tailEnd type="none" w="med" len="med"/>
-                    </a:lnB>
-                  </a:tcPr>
-                </a:tc>
-                <a:tc>
-                  <a:txBody>
-                    <a:bodyPr/>
-                    <a:lstStyle/>
-                    <a:p>
-                      <a:pPr marL="0" indent="0" algn="l">
-                        <a:buNone/>
-                      </a:pPr>
-                      <a:r>
-                        <a:rPr lang="en-US" sz="2000" dirty="0">
-                          <a:solidFill>
-                            <a:srgbClr val="222222"/>
-                          </a:solidFill>
-                          <a:latin typeface="Times New Roman" panose="02020603050405020304"/>
-                          <a:ea typeface="Times New Roman" panose="02020603050405020304"/>
-                          <a:cs typeface="Times New Roman" panose="02020603050405020304"/>
-                        </a:rPr>
-                        <a:t>0.795502</a:t>
-                      </a:r>
-                      <a:endParaRPr lang="en-US" sz="2000" dirty="0">
-                        <a:latin typeface="Times New Roman" panose="02020603050405020304"/>
-                        <a:ea typeface="Times New Roman" panose="02020603050405020304"/>
-                        <a:cs typeface="Times New Roman" panose="02020603050405020304"/>
-                      </a:endParaRPr>
-                    </a:p>
-                  </a:txBody>
-                  <a:tcPr marL="152396" marR="152396" marT="81278" marB="81278" anchor="ctr">
-                    <a:lnL w="12700" cap="flat" cmpd="sng" algn="ctr">
-                      <a:solidFill>
-                        <a:srgbClr val="CBD8E2"/>
-                      </a:solidFill>
-                      <a:prstDash val="solid"/>
-                      <a:round/>
-                      <a:headEnd type="none" w="med" len="med"/>
-                      <a:tailEnd type="none" w="med" len="med"/>
-                    </a:lnL>
-                    <a:lnR w="12700" cap="flat" cmpd="sng" algn="ctr">
-                      <a:solidFill>
-                        <a:srgbClr val="CBD8E2"/>
-                      </a:solidFill>
-                      <a:prstDash val="solid"/>
-                      <a:round/>
-                      <a:headEnd type="none" w="med" len="med"/>
-                      <a:tailEnd type="none" w="med" len="med"/>
-                    </a:lnR>
-                    <a:lnT w="12700" cap="flat" cmpd="sng" algn="ctr">
-                      <a:solidFill>
-                        <a:srgbClr val="CBD8E2"/>
-                      </a:solidFill>
-                      <a:prstDash val="solid"/>
-                      <a:round/>
-                      <a:headEnd type="none" w="med" len="med"/>
-                      <a:tailEnd type="none" w="med" len="med"/>
-                    </a:lnT>
-                    <a:lnB w="12700" cap="flat" cmpd="sng" algn="ctr">
-                      <a:solidFill>
-                        <a:srgbClr val="CBD8E2"/>
-                      </a:solidFill>
-                      <a:prstDash val="solid"/>
-                      <a:round/>
-                      <a:headEnd type="none" w="med" len="med"/>
-                      <a:tailEnd type="none" w="med" len="med"/>
-                    </a:lnB>
-                  </a:tcPr>
-                </a:tc>
-              </a:tr>
-              <a:tr h="685800">
-                <a:tc>
-                  <a:txBody>
-                    <a:bodyPr/>
-                    <a:lstStyle/>
-                    <a:p>
-                      <a:pPr marL="0" indent="0" algn="l">
-                        <a:buNone/>
-                      </a:pPr>
-                      <a:r>
-                        <a:rPr lang="en-US" sz="2000" dirty="0">
-                          <a:solidFill>
-                            <a:srgbClr val="222222"/>
-                          </a:solidFill>
-                          <a:latin typeface="Times New Roman" panose="02020603050405020304"/>
-                          <a:ea typeface="Times New Roman" panose="02020603050405020304"/>
-                          <a:cs typeface="Times New Roman" panose="02020603050405020304"/>
-                        </a:rPr>
-                        <a:t>SVR</a:t>
-                      </a:r>
-                      <a:endParaRPr lang="en-US" sz="2000" dirty="0">
-                        <a:latin typeface="Times New Roman" panose="02020603050405020304"/>
-                        <a:ea typeface="Times New Roman" panose="02020603050405020304"/>
-                        <a:cs typeface="Times New Roman" panose="02020603050405020304"/>
-                      </a:endParaRPr>
-                    </a:p>
-                  </a:txBody>
-                  <a:tcPr marL="152396" marR="152396" marT="81278" marB="81278" anchor="ctr">
-                    <a:lnL w="12700" cap="flat" cmpd="sng" algn="ctr">
-                      <a:solidFill>
-                        <a:srgbClr val="CBD8E2"/>
-                      </a:solidFill>
-                      <a:prstDash val="solid"/>
-                      <a:round/>
-                      <a:headEnd type="none" w="med" len="med"/>
-                      <a:tailEnd type="none" w="med" len="med"/>
-                    </a:lnL>
-                    <a:lnR w="12700" cap="flat" cmpd="sng" algn="ctr">
-                      <a:solidFill>
-                        <a:srgbClr val="CBD8E2"/>
-                      </a:solidFill>
-                      <a:prstDash val="solid"/>
-                      <a:round/>
-                      <a:headEnd type="none" w="med" len="med"/>
-                      <a:tailEnd type="none" w="med" len="med"/>
-                    </a:lnR>
-                    <a:lnT w="12700" cap="flat" cmpd="sng" algn="ctr">
-                      <a:solidFill>
-                        <a:srgbClr val="CBD8E2"/>
-                      </a:solidFill>
-                      <a:prstDash val="solid"/>
-                      <a:round/>
-                      <a:headEnd type="none" w="med" len="med"/>
-                      <a:tailEnd type="none" w="med" len="med"/>
-                    </a:lnT>
-                    <a:lnB w="12700" cap="flat" cmpd="sng" algn="ctr">
-                      <a:solidFill>
-                        <a:srgbClr val="CBD8E2"/>
-                      </a:solidFill>
-                      <a:prstDash val="solid"/>
-                      <a:round/>
-                      <a:headEnd type="none" w="med" len="med"/>
-                      <a:tailEnd type="none" w="med" len="med"/>
-                    </a:lnB>
-                    <a:solidFill>
-                      <a:srgbClr val="F3F7FB"/>
-                    </a:solidFill>
-                  </a:tcPr>
-                </a:tc>
-                <a:tc>
-                  <a:txBody>
-                    <a:bodyPr/>
-                    <a:lstStyle/>
-                    <a:p>
-                      <a:pPr marL="0" indent="0" algn="l">
-                        <a:buNone/>
-                      </a:pPr>
-                      <a:r>
-                        <a:rPr lang="en-US" sz="2000" dirty="0">
-                          <a:solidFill>
-                            <a:srgbClr val="222222"/>
-                          </a:solidFill>
-                          <a:latin typeface="Times New Roman" panose="02020603050405020304"/>
-                          <a:ea typeface="Times New Roman" panose="02020603050405020304"/>
-                          <a:cs typeface="Times New Roman" panose="02020603050405020304"/>
-                        </a:rPr>
-                        <a:t>0.006203</a:t>
-                      </a:r>
-                      <a:endParaRPr lang="en-US" sz="2000" dirty="0">
-                        <a:latin typeface="Times New Roman" panose="02020603050405020304"/>
-                        <a:ea typeface="Times New Roman" panose="02020603050405020304"/>
-                        <a:cs typeface="Times New Roman" panose="02020603050405020304"/>
-                      </a:endParaRPr>
-                    </a:p>
-                  </a:txBody>
-                  <a:tcPr marL="152396" marR="152396" marT="81278" marB="81278" anchor="ctr">
-                    <a:lnL w="12700" cap="flat" cmpd="sng" algn="ctr">
-                      <a:solidFill>
-                        <a:srgbClr val="CBD8E2"/>
-                      </a:solidFill>
-                      <a:prstDash val="solid"/>
-                      <a:round/>
-                      <a:headEnd type="none" w="med" len="med"/>
-                      <a:tailEnd type="none" w="med" len="med"/>
-                    </a:lnL>
-                    <a:lnR w="12700" cap="flat" cmpd="sng" algn="ctr">
-                      <a:solidFill>
-                        <a:srgbClr val="CBD8E2"/>
-                      </a:solidFill>
-                      <a:prstDash val="solid"/>
-                      <a:round/>
-                      <a:headEnd type="none" w="med" len="med"/>
-                      <a:tailEnd type="none" w="med" len="med"/>
-                    </a:lnR>
-                    <a:lnT w="12700" cap="flat" cmpd="sng" algn="ctr">
-                      <a:solidFill>
-                        <a:srgbClr val="CBD8E2"/>
-                      </a:solidFill>
-                      <a:prstDash val="solid"/>
-                      <a:round/>
-                      <a:headEnd type="none" w="med" len="med"/>
-                      <a:tailEnd type="none" w="med" len="med"/>
-                    </a:lnT>
-                    <a:lnB w="12700" cap="flat" cmpd="sng" algn="ctr">
-                      <a:solidFill>
-                        <a:srgbClr val="CBD8E2"/>
-                      </a:solidFill>
-                      <a:prstDash val="solid"/>
-                      <a:round/>
-                      <a:headEnd type="none" w="med" len="med"/>
-                      <a:tailEnd type="none" w="med" len="med"/>
-                    </a:lnB>
-                    <a:solidFill>
-                      <a:srgbClr val="F3F7FB"/>
-                    </a:solidFill>
-                  </a:tcPr>
-                </a:tc>
-                <a:tc>
-                  <a:txBody>
-                    <a:bodyPr/>
-                    <a:lstStyle/>
-                    <a:p>
-                      <a:pPr marL="0" indent="0" algn="l">
-                        <a:buNone/>
-                      </a:pPr>
-                      <a:r>
-                        <a:rPr lang="en-US" sz="2000" dirty="0">
-                          <a:solidFill>
-                            <a:srgbClr val="222222"/>
-                          </a:solidFill>
-                          <a:latin typeface="Times New Roman" panose="02020603050405020304"/>
-                          <a:ea typeface="Times New Roman" panose="02020603050405020304"/>
-                          <a:cs typeface="Times New Roman" panose="02020603050405020304"/>
-                        </a:rPr>
-                        <a:t>0.078761</a:t>
-                      </a:r>
-                      <a:endParaRPr lang="en-US" sz="2000" dirty="0">
-                        <a:latin typeface="Times New Roman" panose="02020603050405020304"/>
-                        <a:ea typeface="Times New Roman" panose="02020603050405020304"/>
-                        <a:cs typeface="Times New Roman" panose="02020603050405020304"/>
-                      </a:endParaRPr>
-                    </a:p>
-                  </a:txBody>
-                  <a:tcPr marL="152396" marR="152396" marT="81278" marB="81278" anchor="ctr">
-                    <a:lnL w="12700" cap="flat" cmpd="sng" algn="ctr">
-                      <a:solidFill>
-                        <a:srgbClr val="CBD8E2"/>
-                      </a:solidFill>
-                      <a:prstDash val="solid"/>
-                      <a:round/>
-                      <a:headEnd type="none" w="med" len="med"/>
-                      <a:tailEnd type="none" w="med" len="med"/>
-                    </a:lnL>
-                    <a:lnR w="12700" cap="flat" cmpd="sng" algn="ctr">
-                      <a:solidFill>
-                        <a:srgbClr val="CBD8E2"/>
-                      </a:solidFill>
-                      <a:prstDash val="solid"/>
-                      <a:round/>
-                      <a:headEnd type="none" w="med" len="med"/>
-                      <a:tailEnd type="none" w="med" len="med"/>
-                    </a:lnR>
-                    <a:lnT w="12700" cap="flat" cmpd="sng" algn="ctr">
-                      <a:solidFill>
-                        <a:srgbClr val="CBD8E2"/>
-                      </a:solidFill>
-                      <a:prstDash val="solid"/>
-                      <a:round/>
-                      <a:headEnd type="none" w="med" len="med"/>
-                      <a:tailEnd type="none" w="med" len="med"/>
-                    </a:lnT>
-                    <a:lnB w="12700" cap="flat" cmpd="sng" algn="ctr">
-                      <a:solidFill>
-                        <a:srgbClr val="CBD8E2"/>
-                      </a:solidFill>
-                      <a:prstDash val="solid"/>
-                      <a:round/>
-                      <a:headEnd type="none" w="med" len="med"/>
-                      <a:tailEnd type="none" w="med" len="med"/>
-                    </a:lnB>
-                    <a:solidFill>
-                      <a:srgbClr val="F3F7FB"/>
-                    </a:solidFill>
-                  </a:tcPr>
-                </a:tc>
-                <a:tc>
-                  <a:txBody>
-                    <a:bodyPr/>
-                    <a:lstStyle/>
-                    <a:p>
-                      <a:pPr marL="0" indent="0" algn="l">
-                        <a:buNone/>
-                      </a:pPr>
-                      <a:r>
-                        <a:rPr lang="en-US" sz="2000" dirty="0">
-                          <a:solidFill>
-                            <a:srgbClr val="222222"/>
-                          </a:solidFill>
-                          <a:latin typeface="Times New Roman" panose="02020603050405020304"/>
-                          <a:ea typeface="Times New Roman" panose="02020603050405020304"/>
-                          <a:cs typeface="Times New Roman" panose="02020603050405020304"/>
-                        </a:rPr>
-                        <a:t>0.064808</a:t>
-                      </a:r>
-                      <a:endParaRPr lang="en-US" sz="2000" dirty="0">
-                        <a:latin typeface="Times New Roman" panose="02020603050405020304"/>
-                        <a:ea typeface="Times New Roman" panose="02020603050405020304"/>
-                        <a:cs typeface="Times New Roman" panose="02020603050405020304"/>
-                      </a:endParaRPr>
-                    </a:p>
-                  </a:txBody>
-                  <a:tcPr marL="152396" marR="152396" marT="81278" marB="81278" anchor="ctr">
-                    <a:lnL w="12700" cap="flat" cmpd="sng" algn="ctr">
-                      <a:solidFill>
-                        <a:srgbClr val="CBD8E2"/>
-                      </a:solidFill>
-                      <a:prstDash val="solid"/>
-                      <a:round/>
-                      <a:headEnd type="none" w="med" len="med"/>
-                      <a:tailEnd type="none" w="med" len="med"/>
-                    </a:lnL>
-                    <a:lnR w="12700" cap="flat" cmpd="sng" algn="ctr">
-                      <a:solidFill>
-                        <a:srgbClr val="CBD8E2"/>
-                      </a:solidFill>
-                      <a:prstDash val="solid"/>
-                      <a:round/>
-                      <a:headEnd type="none" w="med" len="med"/>
-                      <a:tailEnd type="none" w="med" len="med"/>
-                    </a:lnR>
-                    <a:lnT w="12700" cap="flat" cmpd="sng" algn="ctr">
-                      <a:solidFill>
-                        <a:srgbClr val="CBD8E2"/>
-                      </a:solidFill>
-                      <a:prstDash val="solid"/>
-                      <a:round/>
-                      <a:headEnd type="none" w="med" len="med"/>
-                      <a:tailEnd type="none" w="med" len="med"/>
-                    </a:lnT>
-                    <a:lnB w="12700" cap="flat" cmpd="sng" algn="ctr">
-                      <a:solidFill>
-                        <a:srgbClr val="CBD8E2"/>
-                      </a:solidFill>
-                      <a:prstDash val="solid"/>
-                      <a:round/>
-                      <a:headEnd type="none" w="med" len="med"/>
-                      <a:tailEnd type="none" w="med" len="med"/>
-                    </a:lnB>
-                    <a:solidFill>
-                      <a:srgbClr val="F3F7FB"/>
-                    </a:solidFill>
-                  </a:tcPr>
-                </a:tc>
-                <a:tc>
-                  <a:txBody>
-                    <a:bodyPr/>
-                    <a:lstStyle/>
-                    <a:p>
-                      <a:pPr marL="0" indent="0" algn="l">
-                        <a:buNone/>
-                      </a:pPr>
-                      <a:r>
-                        <a:rPr lang="en-US" sz="2000" dirty="0">
-                          <a:solidFill>
-                            <a:srgbClr val="222222"/>
-                          </a:solidFill>
-                          <a:latin typeface="Times New Roman" panose="02020603050405020304"/>
-                          <a:ea typeface="Times New Roman" panose="02020603050405020304"/>
-                          <a:cs typeface="Times New Roman" panose="02020603050405020304"/>
-                        </a:rPr>
-                        <a:t>0.759781</a:t>
-                      </a:r>
-                      <a:endParaRPr lang="en-US" sz="2000" dirty="0">
-                        <a:latin typeface="Times New Roman" panose="02020603050405020304"/>
-                        <a:ea typeface="Times New Roman" panose="02020603050405020304"/>
-                        <a:cs typeface="Times New Roman" panose="02020603050405020304"/>
-                      </a:endParaRPr>
-                    </a:p>
-                  </a:txBody>
-                  <a:tcPr marL="152396" marR="152396" marT="81278" marB="81278" anchor="ctr">
-                    <a:lnL w="12700" cap="flat" cmpd="sng" algn="ctr">
-                      <a:solidFill>
-                        <a:srgbClr val="CBD8E2"/>
-                      </a:solidFill>
-                      <a:prstDash val="solid"/>
-                      <a:round/>
-                      <a:headEnd type="none" w="med" len="med"/>
-                      <a:tailEnd type="none" w="med" len="med"/>
-                    </a:lnL>
-                    <a:lnR w="12700" cap="flat" cmpd="sng" algn="ctr">
-                      <a:solidFill>
-                        <a:srgbClr val="CBD8E2"/>
-                      </a:solidFill>
-                      <a:prstDash val="solid"/>
-                      <a:round/>
-                      <a:headEnd type="none" w="med" len="med"/>
-                      <a:tailEnd type="none" w="med" len="med"/>
-                    </a:lnR>
-                    <a:lnT w="12700" cap="flat" cmpd="sng" algn="ctr">
-                      <a:solidFill>
-                        <a:srgbClr val="CBD8E2"/>
-                      </a:solidFill>
-                      <a:prstDash val="solid"/>
-                      <a:round/>
-                      <a:headEnd type="none" w="med" len="med"/>
-                      <a:tailEnd type="none" w="med" len="med"/>
-                    </a:lnT>
-                    <a:lnB w="12700" cap="flat" cmpd="sng" algn="ctr">
-                      <a:solidFill>
-                        <a:srgbClr val="CBD8E2"/>
-                      </a:solidFill>
-                      <a:prstDash val="solid"/>
-                      <a:round/>
-                      <a:headEnd type="none" w="med" len="med"/>
-                      <a:tailEnd type="none" w="med" len="med"/>
-                    </a:lnB>
-                    <a:solidFill>
-                      <a:srgbClr val="F3F7FB"/>
-                    </a:solidFill>
-                  </a:tcPr>
-                </a:tc>
-              </a:tr>
-              <a:tr h="685800">
-                <a:tc>
-                  <a:txBody>
-                    <a:bodyPr/>
-                    <a:lstStyle/>
-                    <a:p>
-                      <a:pPr marL="0" indent="0" algn="l">
-                        <a:buNone/>
-                      </a:pPr>
-                      <a:r>
-                        <a:rPr lang="en-US" sz="2000" dirty="0">
-                          <a:solidFill>
-                            <a:srgbClr val="222222"/>
-                          </a:solidFill>
-                          <a:latin typeface="Times New Roman" panose="02020603050405020304"/>
-                          <a:ea typeface="Times New Roman" panose="02020603050405020304"/>
-                          <a:cs typeface="Times New Roman" panose="02020603050405020304"/>
-                        </a:rPr>
-                        <a:t>KNN</a:t>
-                      </a:r>
-                      <a:endParaRPr lang="en-US" sz="2000" dirty="0">
-                        <a:latin typeface="Times New Roman" panose="02020603050405020304"/>
-                        <a:ea typeface="Times New Roman" panose="02020603050405020304"/>
-                        <a:cs typeface="Times New Roman" panose="02020603050405020304"/>
-                      </a:endParaRPr>
-                    </a:p>
-                  </a:txBody>
-                  <a:tcPr marL="152396" marR="152396" marT="81278" marB="81278" anchor="ctr">
-                    <a:lnL w="12700" cap="flat" cmpd="sng" algn="ctr">
-                      <a:solidFill>
-                        <a:srgbClr val="CBD8E2"/>
-                      </a:solidFill>
-                      <a:prstDash val="solid"/>
-                      <a:round/>
-                      <a:headEnd type="none" w="med" len="med"/>
-                      <a:tailEnd type="none" w="med" len="med"/>
-                    </a:lnL>
-                    <a:lnR w="12700" cap="flat" cmpd="sng" algn="ctr">
-                      <a:solidFill>
-                        <a:srgbClr val="CBD8E2"/>
-                      </a:solidFill>
-                      <a:prstDash val="solid"/>
-                      <a:round/>
-                      <a:headEnd type="none" w="med" len="med"/>
-                      <a:tailEnd type="none" w="med" len="med"/>
-                    </a:lnR>
-                    <a:lnT w="12700" cap="flat" cmpd="sng" algn="ctr">
-                      <a:solidFill>
-                        <a:srgbClr val="CBD8E2"/>
-                      </a:solidFill>
-                      <a:prstDash val="solid"/>
-                      <a:round/>
-                      <a:headEnd type="none" w="med" len="med"/>
-                      <a:tailEnd type="none" w="med" len="med"/>
-                    </a:lnT>
-                    <a:lnB w="12700" cap="flat" cmpd="sng" algn="ctr">
-                      <a:solidFill>
-                        <a:srgbClr val="CBD8E2"/>
-                      </a:solidFill>
-                      <a:prstDash val="solid"/>
-                      <a:round/>
-                      <a:headEnd type="none" w="med" len="med"/>
-                      <a:tailEnd type="none" w="med" len="med"/>
-                    </a:lnB>
-                  </a:tcPr>
-                </a:tc>
-                <a:tc>
-                  <a:txBody>
-                    <a:bodyPr/>
-                    <a:lstStyle/>
-                    <a:p>
-                      <a:pPr marL="0" indent="0" algn="l">
-                        <a:buNone/>
-                      </a:pPr>
-                      <a:r>
-                        <a:rPr lang="en-US" sz="2000" dirty="0">
-                          <a:solidFill>
-                            <a:srgbClr val="222222"/>
-                          </a:solidFill>
-                          <a:latin typeface="Times New Roman" panose="02020603050405020304"/>
-                          <a:ea typeface="Times New Roman" panose="02020603050405020304"/>
-                          <a:cs typeface="Times New Roman" panose="02020603050405020304"/>
-                        </a:rPr>
-                        <a:t>0.006300</a:t>
-                      </a:r>
-                      <a:endParaRPr lang="en-US" sz="2000" dirty="0">
-                        <a:latin typeface="Times New Roman" panose="02020603050405020304"/>
-                        <a:ea typeface="Times New Roman" panose="02020603050405020304"/>
-                        <a:cs typeface="Times New Roman" panose="02020603050405020304"/>
-                      </a:endParaRPr>
-                    </a:p>
-                  </a:txBody>
-                  <a:tcPr marL="152396" marR="152396" marT="81278" marB="81278" anchor="ctr">
-                    <a:lnL w="12700" cap="flat" cmpd="sng" algn="ctr">
-                      <a:solidFill>
-                        <a:srgbClr val="CBD8E2"/>
-                      </a:solidFill>
-                      <a:prstDash val="solid"/>
-                      <a:round/>
-                      <a:headEnd type="none" w="med" len="med"/>
-                      <a:tailEnd type="none" w="med" len="med"/>
-                    </a:lnL>
-                    <a:lnR w="12700" cap="flat" cmpd="sng" algn="ctr">
-                      <a:solidFill>
-                        <a:srgbClr val="CBD8E2"/>
-                      </a:solidFill>
-                      <a:prstDash val="solid"/>
-                      <a:round/>
-                      <a:headEnd type="none" w="med" len="med"/>
-                      <a:tailEnd type="none" w="med" len="med"/>
-                    </a:lnR>
-                    <a:lnT w="12700" cap="flat" cmpd="sng" algn="ctr">
-                      <a:solidFill>
-                        <a:srgbClr val="CBD8E2"/>
-                      </a:solidFill>
-                      <a:prstDash val="solid"/>
-                      <a:round/>
-                      <a:headEnd type="none" w="med" len="med"/>
-                      <a:tailEnd type="none" w="med" len="med"/>
-                    </a:lnT>
-                    <a:lnB w="12700" cap="flat" cmpd="sng" algn="ctr">
-                      <a:solidFill>
-                        <a:srgbClr val="CBD8E2"/>
-                      </a:solidFill>
-                      <a:prstDash val="solid"/>
-                      <a:round/>
-                      <a:headEnd type="none" w="med" len="med"/>
-                      <a:tailEnd type="none" w="med" len="med"/>
-                    </a:lnB>
-                  </a:tcPr>
-                </a:tc>
-                <a:tc>
-                  <a:txBody>
-                    <a:bodyPr/>
-                    <a:lstStyle/>
-                    <a:p>
-                      <a:pPr marL="0" indent="0" algn="l">
-                        <a:buNone/>
-                      </a:pPr>
-                      <a:r>
-                        <a:rPr lang="en-US" sz="2000" dirty="0">
-                          <a:solidFill>
-                            <a:srgbClr val="222222"/>
-                          </a:solidFill>
-                          <a:latin typeface="Times New Roman" panose="02020603050405020304"/>
-                          <a:ea typeface="Times New Roman" panose="02020603050405020304"/>
-                          <a:cs typeface="Times New Roman" panose="02020603050405020304"/>
-                        </a:rPr>
-                        <a:t>0.079373</a:t>
-                      </a:r>
-                      <a:endParaRPr lang="en-US" sz="2000" dirty="0">
-                        <a:latin typeface="Times New Roman" panose="02020603050405020304"/>
-                        <a:ea typeface="Times New Roman" panose="02020603050405020304"/>
-                        <a:cs typeface="Times New Roman" panose="02020603050405020304"/>
-                      </a:endParaRPr>
-                    </a:p>
-                  </a:txBody>
-                  <a:tcPr marL="152396" marR="152396" marT="81278" marB="81278" anchor="ctr">
-                    <a:lnL w="12700" cap="flat" cmpd="sng" algn="ctr">
-                      <a:solidFill>
-                        <a:srgbClr val="CBD8E2"/>
-                      </a:solidFill>
-                      <a:prstDash val="solid"/>
-                      <a:round/>
-                      <a:headEnd type="none" w="med" len="med"/>
-                      <a:tailEnd type="none" w="med" len="med"/>
-                    </a:lnL>
-                    <a:lnR w="12700" cap="flat" cmpd="sng" algn="ctr">
-                      <a:solidFill>
-                        <a:srgbClr val="CBD8E2"/>
-                      </a:solidFill>
-                      <a:prstDash val="solid"/>
-                      <a:round/>
-                      <a:headEnd type="none" w="med" len="med"/>
-                      <a:tailEnd type="none" w="med" len="med"/>
-                    </a:lnR>
-                    <a:lnT w="12700" cap="flat" cmpd="sng" algn="ctr">
-                      <a:solidFill>
-                        <a:srgbClr val="CBD8E2"/>
-                      </a:solidFill>
-                      <a:prstDash val="solid"/>
-                      <a:round/>
-                      <a:headEnd type="none" w="med" len="med"/>
-                      <a:tailEnd type="none" w="med" len="med"/>
-                    </a:lnT>
-                    <a:lnB w="12700" cap="flat" cmpd="sng" algn="ctr">
-                      <a:solidFill>
-                        <a:srgbClr val="CBD8E2"/>
-                      </a:solidFill>
-                      <a:prstDash val="solid"/>
-                      <a:round/>
-                      <a:headEnd type="none" w="med" len="med"/>
-                      <a:tailEnd type="none" w="med" len="med"/>
-                    </a:lnB>
-                  </a:tcPr>
-                </a:tc>
-                <a:tc>
-                  <a:txBody>
-                    <a:bodyPr/>
-                    <a:lstStyle/>
-                    <a:p>
-                      <a:pPr marL="0" indent="0" algn="l">
-                        <a:buNone/>
-                      </a:pPr>
-                      <a:r>
-                        <a:rPr lang="en-US" sz="2000" dirty="0">
-                          <a:solidFill>
-                            <a:srgbClr val="222222"/>
-                          </a:solidFill>
-                          <a:latin typeface="Times New Roman" panose="02020603050405020304"/>
-                          <a:ea typeface="Times New Roman" panose="02020603050405020304"/>
-                          <a:cs typeface="Times New Roman" panose="02020603050405020304"/>
-                        </a:rPr>
-                        <a:t>0.054225</a:t>
-                      </a:r>
-                      <a:endParaRPr lang="en-US" sz="2000" dirty="0">
-                        <a:latin typeface="Times New Roman" panose="02020603050405020304"/>
-                        <a:ea typeface="Times New Roman" panose="02020603050405020304"/>
-                        <a:cs typeface="Times New Roman" panose="02020603050405020304"/>
-                      </a:endParaRPr>
-                    </a:p>
-                  </a:txBody>
-                  <a:tcPr marL="152396" marR="152396" marT="81278" marB="81278" anchor="ctr">
-                    <a:lnL w="12700" cap="flat" cmpd="sng" algn="ctr">
-                      <a:solidFill>
-                        <a:srgbClr val="CBD8E2"/>
-                      </a:solidFill>
-                      <a:prstDash val="solid"/>
-                      <a:round/>
-                      <a:headEnd type="none" w="med" len="med"/>
-                      <a:tailEnd type="none" w="med" len="med"/>
-                    </a:lnL>
-                    <a:lnR w="12700" cap="flat" cmpd="sng" algn="ctr">
-                      <a:solidFill>
-                        <a:srgbClr val="CBD8E2"/>
-                      </a:solidFill>
-                      <a:prstDash val="solid"/>
-                      <a:round/>
-                      <a:headEnd type="none" w="med" len="med"/>
-                      <a:tailEnd type="none" w="med" len="med"/>
-                    </a:lnR>
-                    <a:lnT w="12700" cap="flat" cmpd="sng" algn="ctr">
-                      <a:solidFill>
-                        <a:srgbClr val="CBD8E2"/>
-                      </a:solidFill>
-                      <a:prstDash val="solid"/>
-                      <a:round/>
-                      <a:headEnd type="none" w="med" len="med"/>
-                      <a:tailEnd type="none" w="med" len="med"/>
-                    </a:lnT>
-                    <a:lnB w="12700" cap="flat" cmpd="sng" algn="ctr">
-                      <a:solidFill>
-                        <a:srgbClr val="CBD8E2"/>
-                      </a:solidFill>
-                      <a:prstDash val="solid"/>
-                      <a:round/>
-                      <a:headEnd type="none" w="med" len="med"/>
-                      <a:tailEnd type="none" w="med" len="med"/>
-                    </a:lnB>
-                  </a:tcPr>
-                </a:tc>
-                <a:tc>
-                  <a:txBody>
-                    <a:bodyPr/>
-                    <a:lstStyle/>
-                    <a:p>
-                      <a:pPr marL="0" indent="0" algn="l">
-                        <a:buNone/>
-                      </a:pPr>
-                      <a:r>
-                        <a:rPr lang="en-US" sz="2000" dirty="0">
-                          <a:solidFill>
-                            <a:srgbClr val="222222"/>
-                          </a:solidFill>
-                          <a:latin typeface="Times New Roman" panose="02020603050405020304"/>
-                          <a:ea typeface="Times New Roman" panose="02020603050405020304"/>
-                          <a:cs typeface="Times New Roman" panose="02020603050405020304"/>
-                        </a:rPr>
-                        <a:t>0.756033</a:t>
-                      </a:r>
-                      <a:endParaRPr lang="en-US" sz="2000" dirty="0">
-                        <a:latin typeface="Times New Roman" panose="02020603050405020304"/>
-                        <a:ea typeface="Times New Roman" panose="02020603050405020304"/>
-                        <a:cs typeface="Times New Roman" panose="02020603050405020304"/>
-                      </a:endParaRPr>
-                    </a:p>
-                  </a:txBody>
-                  <a:tcPr marL="152396" marR="152396" marT="81278" marB="81278" anchor="ctr">
-                    <a:lnL w="12700" cap="flat" cmpd="sng" algn="ctr">
-                      <a:solidFill>
-                        <a:srgbClr val="CBD8E2"/>
-                      </a:solidFill>
-                      <a:prstDash val="solid"/>
-                      <a:round/>
-                      <a:headEnd type="none" w="med" len="med"/>
-                      <a:tailEnd type="none" w="med" len="med"/>
-                    </a:lnL>
-                    <a:lnR w="12700" cap="flat" cmpd="sng" algn="ctr">
-                      <a:solidFill>
-                        <a:srgbClr val="CBD8E2"/>
-                      </a:solidFill>
-                      <a:prstDash val="solid"/>
-                      <a:round/>
-                      <a:headEnd type="none" w="med" len="med"/>
-                      <a:tailEnd type="none" w="med" len="med"/>
-                    </a:lnR>
-                    <a:lnT w="12700" cap="flat" cmpd="sng" algn="ctr">
-                      <a:solidFill>
-                        <a:srgbClr val="CBD8E2"/>
-                      </a:solidFill>
-                      <a:prstDash val="solid"/>
-                      <a:round/>
-                      <a:headEnd type="none" w="med" len="med"/>
-                      <a:tailEnd type="none" w="med" len="med"/>
-                    </a:lnT>
-                    <a:lnB w="12700" cap="flat" cmpd="sng" algn="ctr">
-                      <a:solidFill>
-                        <a:srgbClr val="CBD8E2"/>
-                      </a:solidFill>
-                      <a:prstDash val="solid"/>
-                      <a:round/>
-                      <a:headEnd type="none" w="med" len="med"/>
-                      <a:tailEnd type="none" w="med" len="med"/>
-                    </a:lnB>
-                  </a:tcPr>
-                </a:tc>
-              </a:tr>
-            </a:tbl>
-          </a:graphicData>
-        </a:graphic>
-      </p:graphicFrame>
       <p:sp>
         <p:nvSpPr>
           <p:cNvPr id="147" name="SlideNumber"/>
@@ -9008,6 +6965,1696 @@
           </a:p>
         </p:txBody>
       </p:sp>
+      <p:graphicFrame>
+        <p:nvGraphicFramePr>
+          <p:cNvPr id="7" name="Table 6"/>
+          <p:cNvGraphicFramePr/>
+          <p:nvPr>
+            <p:custDataLst>
+              <p:tags r:id="rId1"/>
+            </p:custDataLst>
+          </p:nvPr>
+        </p:nvGraphicFramePr>
+        <p:xfrm>
+          <a:off x="609600" y="969645"/>
+          <a:ext cx="11184890" cy="4700270"/>
+        </p:xfrm>
+        <a:graphic>
+          <a:graphicData uri="http://schemas.openxmlformats.org/drawingml/2006/table">
+            <a:tbl>
+              <a:tblPr firstRow="1" bandRow="1">
+                <a:tableStyleId>{5C22544A-7EE6-4342-B048-85BDC9FD1C3A}</a:tableStyleId>
+              </a:tblPr>
+              <a:tblGrid>
+                <a:gridCol w="1271270"/>
+                <a:gridCol w="1271270"/>
+                <a:gridCol w="1271270"/>
+                <a:gridCol w="1460500"/>
+                <a:gridCol w="1372235"/>
+                <a:gridCol w="1259840"/>
+                <a:gridCol w="1360805"/>
+                <a:gridCol w="1917700"/>
+              </a:tblGrid>
+              <a:tr h="1191895">
+                <a:tc>
+                  <a:txBody>
+                    <a:bodyPr/>
+                    <a:p>
+                      <a:pPr marL="0" indent="0" algn="ctr" fontAlgn="ctr">
+                        <a:spcBef>
+                          <a:spcPct val="0"/>
+                        </a:spcBef>
+                        <a:spcAft>
+                          <a:spcPct val="0"/>
+                        </a:spcAft>
+                      </a:pPr>
+                      <a:r>
+                        <a:rPr lang="en-US" altLang="zh-CN" sz="2000" i="0">
+                          <a:solidFill>
+                            <a:schemeClr val="bg1"/>
+                          </a:solidFill>
+                          <a:latin typeface="Times New Roman" panose="02020603050405020304"/>
+                          <a:ea typeface="SimSun" panose="02010600030101010101" pitchFamily="2" charset="-122"/>
+                        </a:rPr>
+                        <a:t>Model</a:t>
+                      </a:r>
+                      <a:endParaRPr lang="en-US" altLang="zh-CN" sz="2000" i="0">
+                        <a:solidFill>
+                          <a:schemeClr val="bg1"/>
+                        </a:solidFill>
+                        <a:latin typeface="Times New Roman" panose="02020603050405020304"/>
+                        <a:ea typeface="SimSun" panose="02010600030101010101" pitchFamily="2" charset="-122"/>
+                      </a:endParaRPr>
+                    </a:p>
+                  </a:txBody>
+                  <a:tcPr marL="68580" marR="68580" marT="0" marB="0" anchor="ctr" anchorCtr="0"/>
+                </a:tc>
+                <a:tc>
+                  <a:txBody>
+                    <a:bodyPr/>
+                    <a:p>
+                      <a:pPr marL="0" indent="0" algn="ctr" fontAlgn="ctr">
+                        <a:spcBef>
+                          <a:spcPct val="0"/>
+                        </a:spcBef>
+                        <a:spcAft>
+                          <a:spcPct val="0"/>
+                        </a:spcAft>
+                      </a:pPr>
+                      <a:r>
+                        <a:rPr lang="en-US" altLang="zh-CN" sz="2000" i="0">
+                          <a:solidFill>
+                            <a:schemeClr val="bg1"/>
+                          </a:solidFill>
+                          <a:latin typeface="Times New Roman" panose="02020603050405020304"/>
+                          <a:ea typeface="SimSun" panose="02010600030101010101" pitchFamily="2" charset="-122"/>
+                        </a:rPr>
+                        <a:t>R</a:t>
+                      </a:r>
+                      <a:r>
+                        <a:rPr lang="en-US" altLang="zh-CN" sz="2000" i="0" baseline="30000">
+                          <a:solidFill>
+                            <a:schemeClr val="bg1"/>
+                          </a:solidFill>
+                          <a:latin typeface="Times New Roman" panose="02020603050405020304"/>
+                          <a:ea typeface="SimSun" panose="02010600030101010101" pitchFamily="2" charset="-122"/>
+                        </a:rPr>
+                        <a:t>2</a:t>
+                      </a:r>
+                      <a:r>
+                        <a:rPr lang="en-US" altLang="zh-CN" sz="2000" i="0">
+                          <a:solidFill>
+                            <a:schemeClr val="bg1"/>
+                          </a:solidFill>
+                          <a:latin typeface="Times New Roman" panose="02020603050405020304"/>
+                          <a:ea typeface="SimSun" panose="02010600030101010101" pitchFamily="2" charset="-122"/>
+                        </a:rPr>
+                        <a:t>_test</a:t>
+                      </a:r>
+                      <a:endParaRPr lang="en-US" altLang="zh-CN" sz="2000" i="0">
+                        <a:solidFill>
+                          <a:schemeClr val="bg1"/>
+                        </a:solidFill>
+                        <a:latin typeface="Times New Roman" panose="02020603050405020304"/>
+                        <a:ea typeface="SimSun" panose="02010600030101010101" pitchFamily="2" charset="-122"/>
+                      </a:endParaRPr>
+                    </a:p>
+                  </a:txBody>
+                  <a:tcPr marL="68580" marR="68580" marT="0" marB="0" anchor="ctr" anchorCtr="0"/>
+                </a:tc>
+                <a:tc>
+                  <a:txBody>
+                    <a:bodyPr/>
+                    <a:p>
+                      <a:pPr marL="0" indent="0" algn="ctr" fontAlgn="ctr">
+                        <a:spcBef>
+                          <a:spcPct val="0"/>
+                        </a:spcBef>
+                        <a:spcAft>
+                          <a:spcPct val="0"/>
+                        </a:spcAft>
+                      </a:pPr>
+                      <a:r>
+                        <a:rPr lang="en-US" altLang="zh-CN" sz="2000" i="0">
+                          <a:solidFill>
+                            <a:schemeClr val="bg1"/>
+                          </a:solidFill>
+                          <a:latin typeface="Times New Roman" panose="02020603050405020304"/>
+                          <a:ea typeface="SimSun" panose="02010600030101010101" pitchFamily="2" charset="-122"/>
+                        </a:rPr>
+                        <a:t>R</a:t>
+                      </a:r>
+                      <a:r>
+                        <a:rPr lang="en-US" altLang="zh-CN" sz="2000" i="0" baseline="30000">
+                          <a:solidFill>
+                            <a:schemeClr val="bg1"/>
+                          </a:solidFill>
+                          <a:latin typeface="Times New Roman" panose="02020603050405020304"/>
+                          <a:ea typeface="SimSun" panose="02010600030101010101" pitchFamily="2" charset="-122"/>
+                        </a:rPr>
+                        <a:t>2</a:t>
+                      </a:r>
+                      <a:r>
+                        <a:rPr lang="en-US" altLang="zh-CN" sz="2000" i="0">
+                          <a:solidFill>
+                            <a:schemeClr val="bg1"/>
+                          </a:solidFill>
+                          <a:latin typeface="Times New Roman" panose="02020603050405020304"/>
+                          <a:ea typeface="SimSun" panose="02010600030101010101" pitchFamily="2" charset="-122"/>
+                        </a:rPr>
+                        <a:t>_train</a:t>
+                      </a:r>
+                      <a:endParaRPr lang="en-US" altLang="zh-CN" sz="2000" i="0">
+                        <a:solidFill>
+                          <a:schemeClr val="bg1"/>
+                        </a:solidFill>
+                        <a:latin typeface="Times New Roman" panose="02020603050405020304"/>
+                        <a:ea typeface="SimSun" panose="02010600030101010101" pitchFamily="2" charset="-122"/>
+                      </a:endParaRPr>
+                    </a:p>
+                  </a:txBody>
+                  <a:tcPr marL="68580" marR="68580" marT="0" marB="0" anchor="ctr" anchorCtr="0"/>
+                </a:tc>
+                <a:tc>
+                  <a:txBody>
+                    <a:bodyPr/>
+                    <a:p>
+                      <a:pPr marL="0" indent="0" algn="ctr" fontAlgn="ctr">
+                        <a:spcBef>
+                          <a:spcPct val="0"/>
+                        </a:spcBef>
+                        <a:spcAft>
+                          <a:spcPct val="0"/>
+                        </a:spcAft>
+                      </a:pPr>
+                      <a:r>
+                        <a:rPr lang="en-US" altLang="zh-CN" sz="2000" i="0">
+                          <a:solidFill>
+                            <a:schemeClr val="bg1"/>
+                          </a:solidFill>
+                          <a:latin typeface="Times New Roman" panose="02020603050405020304"/>
+                          <a:ea typeface="SimSun" panose="02010600030101010101" pitchFamily="2" charset="-122"/>
+                        </a:rPr>
+                        <a:t>RMSE_test</a:t>
+                      </a:r>
+                      <a:endParaRPr lang="en-US" altLang="zh-CN" sz="2000" i="0">
+                        <a:solidFill>
+                          <a:schemeClr val="bg1"/>
+                        </a:solidFill>
+                        <a:latin typeface="Times New Roman" panose="02020603050405020304"/>
+                        <a:ea typeface="SimSun" panose="02010600030101010101" pitchFamily="2" charset="-122"/>
+                      </a:endParaRPr>
+                    </a:p>
+                  </a:txBody>
+                  <a:tcPr marL="68580" marR="68580" marT="0" marB="0" anchor="ctr" anchorCtr="0"/>
+                </a:tc>
+                <a:tc>
+                  <a:txBody>
+                    <a:bodyPr/>
+                    <a:p>
+                      <a:pPr marL="0" indent="0" algn="ctr" fontAlgn="ctr">
+                        <a:spcBef>
+                          <a:spcPct val="0"/>
+                        </a:spcBef>
+                        <a:spcAft>
+                          <a:spcPct val="0"/>
+                        </a:spcAft>
+                      </a:pPr>
+                      <a:r>
+                        <a:rPr lang="en-US" altLang="zh-CN" sz="2000" i="0">
+                          <a:solidFill>
+                            <a:schemeClr val="bg1"/>
+                          </a:solidFill>
+                          <a:latin typeface="Times New Roman" panose="02020603050405020304"/>
+                          <a:ea typeface="SimSun" panose="02010600030101010101" pitchFamily="2" charset="-122"/>
+                        </a:rPr>
+                        <a:t>MAE_test</a:t>
+                      </a:r>
+                      <a:endParaRPr lang="en-US" altLang="zh-CN" sz="2000" i="0">
+                        <a:solidFill>
+                          <a:schemeClr val="bg1"/>
+                        </a:solidFill>
+                        <a:latin typeface="Times New Roman" panose="02020603050405020304"/>
+                        <a:ea typeface="SimSun" panose="02010600030101010101" pitchFamily="2" charset="-122"/>
+                      </a:endParaRPr>
+                    </a:p>
+                  </a:txBody>
+                  <a:tcPr marL="68580" marR="68580" marT="0" marB="0" anchor="ctr" anchorCtr="0"/>
+                </a:tc>
+                <a:tc>
+                  <a:txBody>
+                    <a:bodyPr/>
+                    <a:p>
+                      <a:pPr marL="0" indent="0" algn="ctr" fontAlgn="ctr">
+                        <a:spcBef>
+                          <a:spcPct val="0"/>
+                        </a:spcBef>
+                        <a:spcAft>
+                          <a:spcPct val="0"/>
+                        </a:spcAft>
+                      </a:pPr>
+                      <a:r>
+                        <a:rPr lang="en-US" altLang="zh-CN" sz="2000" i="0">
+                          <a:solidFill>
+                            <a:schemeClr val="bg1"/>
+                          </a:solidFill>
+                          <a:latin typeface="Times New Roman" panose="02020603050405020304"/>
+                          <a:ea typeface="SimSun" panose="02010600030101010101" pitchFamily="2" charset="-122"/>
+                        </a:rPr>
+                        <a:t>Train vs Test </a:t>
+                      </a:r>
+                      <a:endParaRPr lang="en-US" altLang="zh-CN" sz="2000" i="0">
+                        <a:solidFill>
+                          <a:schemeClr val="bg1"/>
+                        </a:solidFill>
+                        <a:latin typeface="Times New Roman" panose="02020603050405020304"/>
+                        <a:ea typeface="SimSun" panose="02010600030101010101" pitchFamily="2" charset="-122"/>
+                      </a:endParaRPr>
+                    </a:p>
+                  </a:txBody>
+                  <a:tcPr marL="68580" marR="68580" marT="0" marB="0" anchor="ctr" anchorCtr="0"/>
+                </a:tc>
+                <a:tc>
+                  <a:txBody>
+                    <a:bodyPr/>
+                    <a:p>
+                      <a:pPr marL="0" indent="0" algn="ctr" fontAlgn="ctr">
+                        <a:spcBef>
+                          <a:spcPct val="0"/>
+                        </a:spcBef>
+                        <a:spcAft>
+                          <a:spcPct val="0"/>
+                        </a:spcAft>
+                      </a:pPr>
+                      <a:r>
+                        <a:rPr lang="en-US" altLang="zh-CN" sz="2000" i="0">
+                          <a:solidFill>
+                            <a:schemeClr val="bg1"/>
+                          </a:solidFill>
+                          <a:latin typeface="Times New Roman" panose="02020603050405020304"/>
+                          <a:ea typeface="SimSun" panose="02010600030101010101" pitchFamily="2" charset="-122"/>
+                        </a:rPr>
+                        <a:t>Thời gian dự đoán (ms/mẫu)</a:t>
+                      </a:r>
+                      <a:endParaRPr lang="en-US" altLang="zh-CN" sz="2000" i="0">
+                        <a:solidFill>
+                          <a:schemeClr val="bg1"/>
+                        </a:solidFill>
+                        <a:latin typeface="Times New Roman" panose="02020603050405020304"/>
+                        <a:ea typeface="SimSun" panose="02010600030101010101" pitchFamily="2" charset="-122"/>
+                      </a:endParaRPr>
+                    </a:p>
+                  </a:txBody>
+                  <a:tcPr marL="68580" marR="68580" marT="0" marB="0" anchor="ctr" anchorCtr="0"/>
+                </a:tc>
+                <a:tc>
+                  <a:txBody>
+                    <a:bodyPr/>
+                    <a:p>
+                      <a:pPr marL="0" indent="0" algn="ctr" fontAlgn="ctr">
+                        <a:spcBef>
+                          <a:spcPct val="0"/>
+                        </a:spcBef>
+                        <a:spcAft>
+                          <a:spcPct val="0"/>
+                        </a:spcAft>
+                      </a:pPr>
+                      <a:r>
+                        <a:rPr lang="en-US" altLang="zh-CN" sz="2000" i="0">
+                          <a:solidFill>
+                            <a:schemeClr val="bg1"/>
+                          </a:solidFill>
+                          <a:latin typeface="Times New Roman" panose="02020603050405020304"/>
+                          <a:ea typeface="SimSun" panose="02010600030101010101" pitchFamily="2" charset="-122"/>
+                        </a:rPr>
+                        <a:t>Kích thước file (KB)</a:t>
+                      </a:r>
+                      <a:endParaRPr lang="en-US" altLang="zh-CN" sz="2000" i="0">
+                        <a:solidFill>
+                          <a:schemeClr val="bg1"/>
+                        </a:solidFill>
+                        <a:latin typeface="Times New Roman" panose="02020603050405020304"/>
+                        <a:ea typeface="SimSun" panose="02010600030101010101" pitchFamily="2" charset="-122"/>
+                      </a:endParaRPr>
+                    </a:p>
+                  </a:txBody>
+                  <a:tcPr marL="68580" marR="68580" marT="0" marB="0" anchor="ctr" anchorCtr="0"/>
+                </a:tc>
+              </a:tr>
+              <a:tr h="701675">
+                <a:tc>
+                  <a:txBody>
+                    <a:bodyPr/>
+                    <a:p>
+                      <a:pPr marL="0" indent="0" algn="l" fontAlgn="ctr">
+                        <a:spcBef>
+                          <a:spcPct val="0"/>
+                        </a:spcBef>
+                        <a:spcAft>
+                          <a:spcPct val="0"/>
+                        </a:spcAft>
+                      </a:pPr>
+                      <a:r>
+                        <a:rPr lang="en-US" altLang="zh-CN" sz="2000" i="0">
+                          <a:solidFill>
+                            <a:schemeClr val="accent1">
+                              <a:lumMod val="75000"/>
+                            </a:schemeClr>
+                          </a:solidFill>
+                          <a:latin typeface="Times New Roman" panose="02020603050405020304"/>
+                          <a:ea typeface="SimSun" panose="02010600030101010101" pitchFamily="2" charset="-122"/>
+                        </a:rPr>
+                        <a:t>Linear Regression</a:t>
+                      </a:r>
+                      <a:endParaRPr lang="en-US" altLang="zh-CN" sz="2000" i="0">
+                        <a:solidFill>
+                          <a:schemeClr val="accent1">
+                            <a:lumMod val="75000"/>
+                          </a:schemeClr>
+                        </a:solidFill>
+                        <a:latin typeface="Times New Roman" panose="02020603050405020304"/>
+                        <a:ea typeface="SimSun" panose="02010600030101010101" pitchFamily="2" charset="-122"/>
+                      </a:endParaRPr>
+                    </a:p>
+                  </a:txBody>
+                  <a:tcPr marL="68580" marR="68580" marT="0" marB="0" anchor="ctr" anchorCtr="0"/>
+                </a:tc>
+                <a:tc>
+                  <a:txBody>
+                    <a:bodyPr/>
+                    <a:p>
+                      <a:pPr marL="0" indent="0" algn="ctr" fontAlgn="ctr">
+                        <a:spcBef>
+                          <a:spcPct val="0"/>
+                        </a:spcBef>
+                        <a:spcAft>
+                          <a:spcPct val="0"/>
+                        </a:spcAft>
+                      </a:pPr>
+                      <a:r>
+                        <a:rPr lang="en-US" altLang="zh-CN" sz="2500" i="0">
+                          <a:solidFill>
+                            <a:srgbClr val="000000"/>
+                          </a:solidFill>
+                          <a:latin typeface="Times New Roman" panose="02020603050405020304"/>
+                          <a:ea typeface="SimSun" panose="02010600030101010101" pitchFamily="2" charset="-122"/>
+                        </a:rPr>
+                        <a:t>0.8212</a:t>
+                      </a:r>
+                      <a:endParaRPr lang="en-US" altLang="zh-CN" sz="2500" i="0">
+                        <a:solidFill>
+                          <a:srgbClr val="000000"/>
+                        </a:solidFill>
+                        <a:latin typeface="Times New Roman" panose="02020603050405020304"/>
+                        <a:ea typeface="SimSun" panose="02010600030101010101" pitchFamily="2" charset="-122"/>
+                      </a:endParaRPr>
+                    </a:p>
+                  </a:txBody>
+                  <a:tcPr marL="68580" marR="68580" marT="0" marB="0" anchor="ctr" anchorCtr="0"/>
+                </a:tc>
+                <a:tc>
+                  <a:txBody>
+                    <a:bodyPr/>
+                    <a:p>
+                      <a:pPr marL="0" indent="0" algn="ctr" fontAlgn="ctr">
+                        <a:spcBef>
+                          <a:spcPct val="0"/>
+                        </a:spcBef>
+                        <a:spcAft>
+                          <a:spcPct val="0"/>
+                        </a:spcAft>
+                      </a:pPr>
+                      <a:r>
+                        <a:rPr lang="en-US" altLang="zh-CN" sz="2500" i="0">
+                          <a:solidFill>
+                            <a:srgbClr val="000000"/>
+                          </a:solidFill>
+                          <a:latin typeface="Times New Roman" panose="02020603050405020304"/>
+                          <a:ea typeface="SimSun" panose="02010600030101010101" pitchFamily="2" charset="-122"/>
+                        </a:rPr>
+                        <a:t>0.7952</a:t>
+                      </a:r>
+                      <a:endParaRPr lang="en-US" altLang="zh-CN" sz="2500" i="0">
+                        <a:solidFill>
+                          <a:srgbClr val="000000"/>
+                        </a:solidFill>
+                        <a:latin typeface="Times New Roman" panose="02020603050405020304"/>
+                        <a:ea typeface="SimSun" panose="02010600030101010101" pitchFamily="2" charset="-122"/>
+                      </a:endParaRPr>
+                    </a:p>
+                  </a:txBody>
+                  <a:tcPr marL="68580" marR="68580" marT="0" marB="0" anchor="ctr" anchorCtr="0"/>
+                </a:tc>
+                <a:tc>
+                  <a:txBody>
+                    <a:bodyPr/>
+                    <a:p>
+                      <a:pPr marL="0" indent="0" algn="ctr" fontAlgn="ctr">
+                        <a:spcBef>
+                          <a:spcPct val="0"/>
+                        </a:spcBef>
+                        <a:spcAft>
+                          <a:spcPct val="0"/>
+                        </a:spcAft>
+                      </a:pPr>
+                      <a:r>
+                        <a:rPr lang="en-US" altLang="zh-CN" sz="2500" i="0">
+                          <a:solidFill>
+                            <a:srgbClr val="000000"/>
+                          </a:solidFill>
+                          <a:latin typeface="Times New Roman" panose="02020603050405020304"/>
+                          <a:ea typeface="SimSun" panose="02010600030101010101" pitchFamily="2" charset="-122"/>
+                        </a:rPr>
+                        <a:t>0.0679</a:t>
+                      </a:r>
+                      <a:endParaRPr lang="en-US" altLang="zh-CN" sz="2500" i="0">
+                        <a:solidFill>
+                          <a:srgbClr val="000000"/>
+                        </a:solidFill>
+                        <a:latin typeface="Times New Roman" panose="02020603050405020304"/>
+                        <a:ea typeface="SimSun" panose="02010600030101010101" pitchFamily="2" charset="-122"/>
+                      </a:endParaRPr>
+                    </a:p>
+                  </a:txBody>
+                  <a:tcPr marL="68580" marR="68580" marT="0" marB="0" anchor="ctr" anchorCtr="0"/>
+                </a:tc>
+                <a:tc>
+                  <a:txBody>
+                    <a:bodyPr/>
+                    <a:p>
+                      <a:pPr marL="0" indent="0" algn="ctr" fontAlgn="ctr">
+                        <a:spcBef>
+                          <a:spcPct val="0"/>
+                        </a:spcBef>
+                        <a:spcAft>
+                          <a:spcPct val="0"/>
+                        </a:spcAft>
+                      </a:pPr>
+                      <a:r>
+                        <a:rPr lang="en-US" altLang="zh-CN" sz="2500" i="0">
+                          <a:solidFill>
+                            <a:srgbClr val="000000"/>
+                          </a:solidFill>
+                          <a:latin typeface="Times New Roman" panose="02020603050405020304"/>
+                          <a:ea typeface="SimSun" panose="02010600030101010101" pitchFamily="2" charset="-122"/>
+                        </a:rPr>
+                        <a:t>0.048</a:t>
+                      </a:r>
+                      <a:endParaRPr lang="en-US" altLang="zh-CN" sz="2500" i="0">
+                        <a:solidFill>
+                          <a:srgbClr val="000000"/>
+                        </a:solidFill>
+                        <a:latin typeface="Times New Roman" panose="02020603050405020304"/>
+                        <a:ea typeface="SimSun" panose="02010600030101010101" pitchFamily="2" charset="-122"/>
+                      </a:endParaRPr>
+                    </a:p>
+                  </a:txBody>
+                  <a:tcPr marL="68580" marR="68580" marT="0" marB="0" anchor="ctr" anchorCtr="0"/>
+                </a:tc>
+                <a:tc>
+                  <a:txBody>
+                    <a:bodyPr/>
+                    <a:p>
+                      <a:pPr marL="0" indent="0" algn="ctr" fontAlgn="ctr">
+                        <a:spcBef>
+                          <a:spcPct val="0"/>
+                        </a:spcBef>
+                        <a:spcAft>
+                          <a:spcPct val="0"/>
+                        </a:spcAft>
+                      </a:pPr>
+                      <a:r>
+                        <a:rPr lang="en-US" altLang="zh-CN" sz="2500" i="0">
+                          <a:solidFill>
+                            <a:srgbClr val="000000"/>
+                          </a:solidFill>
+                          <a:latin typeface="Times New Roman" panose="02020603050405020304"/>
+                          <a:ea typeface="SimSun" panose="02010600030101010101" pitchFamily="2" charset="-122"/>
+                        </a:rPr>
+                        <a:t>-0.026</a:t>
+                      </a:r>
+                      <a:endParaRPr lang="en-US" altLang="zh-CN" sz="2500" i="0">
+                        <a:solidFill>
+                          <a:srgbClr val="000000"/>
+                        </a:solidFill>
+                        <a:latin typeface="Times New Roman" panose="02020603050405020304"/>
+                        <a:ea typeface="SimSun" panose="02010600030101010101" pitchFamily="2" charset="-122"/>
+                      </a:endParaRPr>
+                    </a:p>
+                  </a:txBody>
+                  <a:tcPr marL="68580" marR="68580" marT="0" marB="0" anchor="ctr" anchorCtr="0"/>
+                </a:tc>
+                <a:tc>
+                  <a:txBody>
+                    <a:bodyPr/>
+                    <a:p>
+                      <a:pPr marL="0" indent="0" algn="ctr" fontAlgn="ctr">
+                        <a:spcBef>
+                          <a:spcPct val="0"/>
+                        </a:spcBef>
+                        <a:spcAft>
+                          <a:spcPct val="0"/>
+                        </a:spcAft>
+                      </a:pPr>
+                      <a:r>
+                        <a:rPr lang="en-US" altLang="zh-CN" sz="2500" i="0">
+                          <a:solidFill>
+                            <a:srgbClr val="000000"/>
+                          </a:solidFill>
+                          <a:latin typeface="Times New Roman" panose="02020603050405020304"/>
+                          <a:ea typeface="SimSun" panose="02010600030101010101" pitchFamily="2" charset="-122"/>
+                        </a:rPr>
+                        <a:t>0.008</a:t>
+                      </a:r>
+                      <a:endParaRPr lang="en-US" altLang="zh-CN" sz="2500" i="0">
+                        <a:solidFill>
+                          <a:srgbClr val="000000"/>
+                        </a:solidFill>
+                        <a:latin typeface="Times New Roman" panose="02020603050405020304"/>
+                        <a:ea typeface="SimSun" panose="02010600030101010101" pitchFamily="2" charset="-122"/>
+                      </a:endParaRPr>
+                    </a:p>
+                  </a:txBody>
+                  <a:tcPr marL="68580" marR="68580" marT="0" marB="0" anchor="ctr" anchorCtr="0"/>
+                </a:tc>
+                <a:tc>
+                  <a:txBody>
+                    <a:bodyPr/>
+                    <a:p>
+                      <a:pPr marL="0" indent="0" algn="ctr" fontAlgn="ctr">
+                        <a:spcBef>
+                          <a:spcPct val="0"/>
+                        </a:spcBef>
+                        <a:spcAft>
+                          <a:spcPct val="0"/>
+                        </a:spcAft>
+                      </a:pPr>
+                      <a:r>
+                        <a:rPr lang="en-US" altLang="zh-CN" sz="2500" i="0">
+                          <a:solidFill>
+                            <a:srgbClr val="000000"/>
+                          </a:solidFill>
+                          <a:latin typeface="Times New Roman" panose="02020603050405020304"/>
+                          <a:ea typeface="SimSun" panose="02010600030101010101" pitchFamily="2" charset="-122"/>
+                        </a:rPr>
+                        <a:t>0.64</a:t>
+                      </a:r>
+                      <a:endParaRPr lang="en-US" altLang="zh-CN" sz="2500" i="0">
+                        <a:solidFill>
+                          <a:srgbClr val="000000"/>
+                        </a:solidFill>
+                        <a:latin typeface="Times New Roman" panose="02020603050405020304"/>
+                        <a:ea typeface="SimSun" panose="02010600030101010101" pitchFamily="2" charset="-122"/>
+                      </a:endParaRPr>
+                    </a:p>
+                  </a:txBody>
+                  <a:tcPr marL="68580" marR="68580" marT="0" marB="0" anchor="ctr" anchorCtr="0"/>
+                </a:tc>
+              </a:tr>
+              <a:tr h="701675">
+                <a:tc>
+                  <a:txBody>
+                    <a:bodyPr/>
+                    <a:p>
+                      <a:pPr marL="0" indent="0" algn="l" fontAlgn="ctr">
+                        <a:spcBef>
+                          <a:spcPct val="0"/>
+                        </a:spcBef>
+                        <a:spcAft>
+                          <a:spcPct val="0"/>
+                        </a:spcAft>
+                      </a:pPr>
+                      <a:r>
+                        <a:rPr lang="en-US" altLang="zh-CN" sz="2000" i="0">
+                          <a:solidFill>
+                            <a:schemeClr val="accent1">
+                              <a:lumMod val="75000"/>
+                            </a:schemeClr>
+                          </a:solidFill>
+                          <a:latin typeface="Times New Roman" panose="02020603050405020304"/>
+                          <a:ea typeface="SimSun" panose="02010600030101010101" pitchFamily="2" charset="-122"/>
+                        </a:rPr>
+                        <a:t>Random Forest</a:t>
+                      </a:r>
+                      <a:endParaRPr lang="en-US" altLang="zh-CN" sz="2000" i="0">
+                        <a:solidFill>
+                          <a:schemeClr val="accent1">
+                            <a:lumMod val="75000"/>
+                          </a:schemeClr>
+                        </a:solidFill>
+                        <a:latin typeface="Times New Roman" panose="02020603050405020304"/>
+                        <a:ea typeface="SimSun" panose="02010600030101010101" pitchFamily="2" charset="-122"/>
+                      </a:endParaRPr>
+                    </a:p>
+                  </a:txBody>
+                  <a:tcPr marL="68580" marR="68580" marT="0" marB="0" anchor="ctr" anchorCtr="0"/>
+                </a:tc>
+                <a:tc>
+                  <a:txBody>
+                    <a:bodyPr/>
+                    <a:p>
+                      <a:pPr marL="0" indent="0" algn="ctr" fontAlgn="ctr">
+                        <a:spcBef>
+                          <a:spcPct val="0"/>
+                        </a:spcBef>
+                        <a:spcAft>
+                          <a:spcPct val="0"/>
+                        </a:spcAft>
+                      </a:pPr>
+                      <a:r>
+                        <a:rPr lang="en-US" altLang="zh-CN" sz="2500" i="0">
+                          <a:solidFill>
+                            <a:srgbClr val="000000"/>
+                          </a:solidFill>
+                          <a:latin typeface="Times New Roman" panose="02020603050405020304"/>
+                          <a:ea typeface="SimSun" panose="02010600030101010101" pitchFamily="2" charset="-122"/>
+                        </a:rPr>
+                        <a:t>0.8079</a:t>
+                      </a:r>
+                      <a:endParaRPr lang="en-US" altLang="zh-CN" sz="2500" i="0">
+                        <a:solidFill>
+                          <a:srgbClr val="000000"/>
+                        </a:solidFill>
+                        <a:latin typeface="Times New Roman" panose="02020603050405020304"/>
+                        <a:ea typeface="SimSun" panose="02010600030101010101" pitchFamily="2" charset="-122"/>
+                      </a:endParaRPr>
+                    </a:p>
+                  </a:txBody>
+                  <a:tcPr marL="68580" marR="68580" marT="0" marB="0" anchor="ctr" anchorCtr="0"/>
+                </a:tc>
+                <a:tc>
+                  <a:txBody>
+                    <a:bodyPr/>
+                    <a:p>
+                      <a:pPr marL="0" indent="0" algn="ctr" fontAlgn="ctr">
+                        <a:spcBef>
+                          <a:spcPct val="0"/>
+                        </a:spcBef>
+                        <a:spcAft>
+                          <a:spcPct val="0"/>
+                        </a:spcAft>
+                      </a:pPr>
+                      <a:r>
+                        <a:rPr lang="en-US" altLang="zh-CN" sz="2500" i="0">
+                          <a:solidFill>
+                            <a:srgbClr val="000000"/>
+                          </a:solidFill>
+                          <a:latin typeface="Times New Roman" panose="02020603050405020304"/>
+                          <a:ea typeface="SimSun" panose="02010600030101010101" pitchFamily="2" charset="-122"/>
+                        </a:rPr>
+                        <a:t>0.9634</a:t>
+                      </a:r>
+                      <a:endParaRPr lang="en-US" altLang="zh-CN" sz="2500" i="0">
+                        <a:solidFill>
+                          <a:srgbClr val="000000"/>
+                        </a:solidFill>
+                        <a:latin typeface="Times New Roman" panose="02020603050405020304"/>
+                        <a:ea typeface="SimSun" panose="02010600030101010101" pitchFamily="2" charset="-122"/>
+                      </a:endParaRPr>
+                    </a:p>
+                  </a:txBody>
+                  <a:tcPr marL="68580" marR="68580" marT="0" marB="0" anchor="ctr" anchorCtr="0"/>
+                </a:tc>
+                <a:tc>
+                  <a:txBody>
+                    <a:bodyPr/>
+                    <a:p>
+                      <a:pPr marL="0" indent="0" algn="ctr" fontAlgn="ctr">
+                        <a:spcBef>
+                          <a:spcPct val="0"/>
+                        </a:spcBef>
+                        <a:spcAft>
+                          <a:spcPct val="0"/>
+                        </a:spcAft>
+                      </a:pPr>
+                      <a:r>
+                        <a:rPr lang="en-US" altLang="zh-CN" sz="2500" i="0">
+                          <a:solidFill>
+                            <a:srgbClr val="000000"/>
+                          </a:solidFill>
+                          <a:latin typeface="Times New Roman" panose="02020603050405020304"/>
+                          <a:ea typeface="SimSun" panose="02010600030101010101" pitchFamily="2" charset="-122"/>
+                        </a:rPr>
+                        <a:t>0.0704</a:t>
+                      </a:r>
+                      <a:endParaRPr lang="en-US" altLang="zh-CN" sz="2500" i="0">
+                        <a:solidFill>
+                          <a:srgbClr val="000000"/>
+                        </a:solidFill>
+                        <a:latin typeface="Times New Roman" panose="02020603050405020304"/>
+                        <a:ea typeface="SimSun" panose="02010600030101010101" pitchFamily="2" charset="-122"/>
+                      </a:endParaRPr>
+                    </a:p>
+                  </a:txBody>
+                  <a:tcPr marL="68580" marR="68580" marT="0" marB="0" anchor="ctr" anchorCtr="0"/>
+                </a:tc>
+                <a:tc>
+                  <a:txBody>
+                    <a:bodyPr/>
+                    <a:p>
+                      <a:pPr marL="0" indent="0" algn="ctr" fontAlgn="ctr">
+                        <a:spcBef>
+                          <a:spcPct val="0"/>
+                        </a:spcBef>
+                        <a:spcAft>
+                          <a:spcPct val="0"/>
+                        </a:spcAft>
+                      </a:pPr>
+                      <a:r>
+                        <a:rPr lang="en-US" altLang="zh-CN" sz="2500" i="0">
+                          <a:solidFill>
+                            <a:srgbClr val="000000"/>
+                          </a:solidFill>
+                          <a:latin typeface="Times New Roman" panose="02020603050405020304"/>
+                          <a:ea typeface="SimSun" panose="02010600030101010101" pitchFamily="2" charset="-122"/>
+                        </a:rPr>
+                        <a:t>0.0498</a:t>
+                      </a:r>
+                      <a:endParaRPr lang="en-US" altLang="zh-CN" sz="2500" i="0">
+                        <a:solidFill>
+                          <a:srgbClr val="000000"/>
+                        </a:solidFill>
+                        <a:latin typeface="Times New Roman" panose="02020603050405020304"/>
+                        <a:ea typeface="SimSun" panose="02010600030101010101" pitchFamily="2" charset="-122"/>
+                      </a:endParaRPr>
+                    </a:p>
+                  </a:txBody>
+                  <a:tcPr marL="68580" marR="68580" marT="0" marB="0" anchor="ctr" anchorCtr="0"/>
+                </a:tc>
+                <a:tc>
+                  <a:txBody>
+                    <a:bodyPr/>
+                    <a:p>
+                      <a:pPr marL="0" indent="0" algn="ctr" fontAlgn="ctr">
+                        <a:spcBef>
+                          <a:spcPct val="0"/>
+                        </a:spcBef>
+                        <a:spcAft>
+                          <a:spcPct val="0"/>
+                        </a:spcAft>
+                      </a:pPr>
+                      <a:r>
+                        <a:rPr lang="en-US" altLang="zh-CN" sz="2500" i="0">
+                          <a:solidFill>
+                            <a:srgbClr val="000000"/>
+                          </a:solidFill>
+                          <a:latin typeface="Times New Roman" panose="02020603050405020304"/>
+                          <a:ea typeface="SimSun" panose="02010600030101010101" pitchFamily="2" charset="-122"/>
+                        </a:rPr>
+                        <a:t>0.1555</a:t>
+                      </a:r>
+                      <a:endParaRPr lang="en-US" altLang="zh-CN" sz="2500" i="0">
+                        <a:solidFill>
+                          <a:srgbClr val="000000"/>
+                        </a:solidFill>
+                        <a:latin typeface="Times New Roman" panose="02020603050405020304"/>
+                        <a:ea typeface="SimSun" panose="02010600030101010101" pitchFamily="2" charset="-122"/>
+                      </a:endParaRPr>
+                    </a:p>
+                  </a:txBody>
+                  <a:tcPr marL="68580" marR="68580" marT="0" marB="0" anchor="ctr" anchorCtr="0"/>
+                </a:tc>
+                <a:tc>
+                  <a:txBody>
+                    <a:bodyPr/>
+                    <a:p>
+                      <a:pPr marL="0" indent="0" algn="ctr" fontAlgn="ctr">
+                        <a:spcBef>
+                          <a:spcPct val="0"/>
+                        </a:spcBef>
+                        <a:spcAft>
+                          <a:spcPct val="0"/>
+                        </a:spcAft>
+                      </a:pPr>
+                      <a:r>
+                        <a:rPr lang="en-US" altLang="zh-CN" sz="2500" i="0">
+                          <a:solidFill>
+                            <a:srgbClr val="000000"/>
+                          </a:solidFill>
+                          <a:latin typeface="Times New Roman" panose="02020603050405020304"/>
+                          <a:ea typeface="SimSun" panose="02010600030101010101" pitchFamily="2" charset="-122"/>
+                        </a:rPr>
+                        <a:t>0.624</a:t>
+                      </a:r>
+                      <a:endParaRPr lang="en-US" altLang="zh-CN" sz="2500" i="0">
+                        <a:solidFill>
+                          <a:srgbClr val="000000"/>
+                        </a:solidFill>
+                        <a:latin typeface="Times New Roman" panose="02020603050405020304"/>
+                        <a:ea typeface="SimSun" panose="02010600030101010101" pitchFamily="2" charset="-122"/>
+                      </a:endParaRPr>
+                    </a:p>
+                  </a:txBody>
+                  <a:tcPr marL="68580" marR="68580" marT="0" marB="0" anchor="ctr" anchorCtr="0"/>
+                </a:tc>
+                <a:tc>
+                  <a:txBody>
+                    <a:bodyPr/>
+                    <a:p>
+                      <a:pPr marL="0" indent="0" algn="ctr" fontAlgn="ctr">
+                        <a:spcBef>
+                          <a:spcPct val="0"/>
+                        </a:spcBef>
+                        <a:spcAft>
+                          <a:spcPct val="0"/>
+                        </a:spcAft>
+                      </a:pPr>
+                      <a:r>
+                        <a:rPr lang="en-US" altLang="zh-CN" sz="2500" i="0">
+                          <a:solidFill>
+                            <a:srgbClr val="000000"/>
+                          </a:solidFill>
+                          <a:latin typeface="Times New Roman" panose="02020603050405020304"/>
+                          <a:ea typeface="SimSun" panose="02010600030101010101" pitchFamily="2" charset="-122"/>
+                        </a:rPr>
+                        <a:t>2449.13</a:t>
+                      </a:r>
+                      <a:endParaRPr lang="en-US" altLang="zh-CN" sz="2500" i="0">
+                        <a:solidFill>
+                          <a:srgbClr val="000000"/>
+                        </a:solidFill>
+                        <a:latin typeface="Times New Roman" panose="02020603050405020304"/>
+                        <a:ea typeface="SimSun" panose="02010600030101010101" pitchFamily="2" charset="-122"/>
+                      </a:endParaRPr>
+                    </a:p>
+                  </a:txBody>
+                  <a:tcPr marL="68580" marR="68580" marT="0" marB="0" anchor="ctr" anchorCtr="0"/>
+                </a:tc>
+              </a:tr>
+              <a:tr h="701675">
+                <a:tc>
+                  <a:txBody>
+                    <a:bodyPr/>
+                    <a:p>
+                      <a:pPr marL="0" indent="0" algn="l" fontAlgn="ctr">
+                        <a:spcBef>
+                          <a:spcPct val="0"/>
+                        </a:spcBef>
+                        <a:spcAft>
+                          <a:spcPct val="0"/>
+                        </a:spcAft>
+                      </a:pPr>
+                      <a:r>
+                        <a:rPr lang="en-US" altLang="zh-CN" sz="2000" i="0">
+                          <a:solidFill>
+                            <a:schemeClr val="accent1">
+                              <a:lumMod val="75000"/>
+                            </a:schemeClr>
+                          </a:solidFill>
+                          <a:latin typeface="Times New Roman" panose="02020603050405020304"/>
+                          <a:ea typeface="SimSun" panose="02010600030101010101" pitchFamily="2" charset="-122"/>
+                        </a:rPr>
+                        <a:t>Gradient Boosting</a:t>
+                      </a:r>
+                      <a:endParaRPr lang="en-US" altLang="zh-CN" sz="2000" i="0">
+                        <a:solidFill>
+                          <a:schemeClr val="accent1">
+                            <a:lumMod val="75000"/>
+                          </a:schemeClr>
+                        </a:solidFill>
+                        <a:latin typeface="Times New Roman" panose="02020603050405020304"/>
+                        <a:ea typeface="SimSun" panose="02010600030101010101" pitchFamily="2" charset="-122"/>
+                      </a:endParaRPr>
+                    </a:p>
+                  </a:txBody>
+                  <a:tcPr marL="68580" marR="68580" marT="0" marB="0" anchor="ctr" anchorCtr="0"/>
+                </a:tc>
+                <a:tc>
+                  <a:txBody>
+                    <a:bodyPr/>
+                    <a:p>
+                      <a:pPr marL="0" indent="0" algn="ctr" fontAlgn="ctr">
+                        <a:spcBef>
+                          <a:spcPct val="0"/>
+                        </a:spcBef>
+                        <a:spcAft>
+                          <a:spcPct val="0"/>
+                        </a:spcAft>
+                      </a:pPr>
+                      <a:r>
+                        <a:rPr lang="en-US" altLang="zh-CN" sz="2500" i="0">
+                          <a:solidFill>
+                            <a:srgbClr val="000000"/>
+                          </a:solidFill>
+                          <a:latin typeface="Times New Roman" panose="02020603050405020304"/>
+                          <a:ea typeface="SimSun" panose="02010600030101010101" pitchFamily="2" charset="-122"/>
+                        </a:rPr>
+                        <a:t>0.7958</a:t>
+                      </a:r>
+                      <a:endParaRPr lang="en-US" altLang="zh-CN" sz="2500" i="0">
+                        <a:solidFill>
+                          <a:srgbClr val="000000"/>
+                        </a:solidFill>
+                        <a:latin typeface="Times New Roman" panose="02020603050405020304"/>
+                        <a:ea typeface="SimSun" panose="02010600030101010101" pitchFamily="2" charset="-122"/>
+                      </a:endParaRPr>
+                    </a:p>
+                  </a:txBody>
+                  <a:tcPr marL="68580" marR="68580" marT="0" marB="0" anchor="ctr" anchorCtr="0"/>
+                </a:tc>
+                <a:tc>
+                  <a:txBody>
+                    <a:bodyPr/>
+                    <a:p>
+                      <a:pPr marL="0" indent="0" algn="ctr" fontAlgn="ctr">
+                        <a:spcBef>
+                          <a:spcPct val="0"/>
+                        </a:spcBef>
+                        <a:spcAft>
+                          <a:spcPct val="0"/>
+                        </a:spcAft>
+                      </a:pPr>
+                      <a:r>
+                        <a:rPr lang="en-US" altLang="zh-CN" sz="2500" i="0">
+                          <a:solidFill>
+                            <a:srgbClr val="000000"/>
+                          </a:solidFill>
+                          <a:latin typeface="Times New Roman" panose="02020603050405020304"/>
+                          <a:ea typeface="SimSun" panose="02010600030101010101" pitchFamily="2" charset="-122"/>
+                        </a:rPr>
+                        <a:t>0.9202</a:t>
+                      </a:r>
+                      <a:endParaRPr lang="en-US" altLang="zh-CN" sz="2500" i="0">
+                        <a:solidFill>
+                          <a:srgbClr val="000000"/>
+                        </a:solidFill>
+                        <a:latin typeface="Times New Roman" panose="02020603050405020304"/>
+                        <a:ea typeface="SimSun" panose="02010600030101010101" pitchFamily="2" charset="-122"/>
+                      </a:endParaRPr>
+                    </a:p>
+                  </a:txBody>
+                  <a:tcPr marL="68580" marR="68580" marT="0" marB="0" anchor="ctr" anchorCtr="0"/>
+                </a:tc>
+                <a:tc>
+                  <a:txBody>
+                    <a:bodyPr/>
+                    <a:p>
+                      <a:pPr marL="0" indent="0" algn="ctr" fontAlgn="ctr">
+                        <a:spcBef>
+                          <a:spcPct val="0"/>
+                        </a:spcBef>
+                        <a:spcAft>
+                          <a:spcPct val="0"/>
+                        </a:spcAft>
+                      </a:pPr>
+                      <a:r>
+                        <a:rPr lang="en-US" altLang="zh-CN" sz="2500" i="0">
+                          <a:solidFill>
+                            <a:srgbClr val="000000"/>
+                          </a:solidFill>
+                          <a:latin typeface="Times New Roman" panose="02020603050405020304"/>
+                          <a:ea typeface="SimSun" panose="02010600030101010101" pitchFamily="2" charset="-122"/>
+                        </a:rPr>
+                        <a:t>0.0726</a:t>
+                      </a:r>
+                      <a:endParaRPr lang="en-US" altLang="zh-CN" sz="2500" i="0">
+                        <a:solidFill>
+                          <a:srgbClr val="000000"/>
+                        </a:solidFill>
+                        <a:latin typeface="Times New Roman" panose="02020603050405020304"/>
+                        <a:ea typeface="SimSun" panose="02010600030101010101" pitchFamily="2" charset="-122"/>
+                      </a:endParaRPr>
+                    </a:p>
+                  </a:txBody>
+                  <a:tcPr marL="68580" marR="68580" marT="0" marB="0" anchor="ctr" anchorCtr="0"/>
+                </a:tc>
+                <a:tc>
+                  <a:txBody>
+                    <a:bodyPr/>
+                    <a:p>
+                      <a:pPr marL="0" indent="0" algn="ctr" fontAlgn="ctr">
+                        <a:spcBef>
+                          <a:spcPct val="0"/>
+                        </a:spcBef>
+                        <a:spcAft>
+                          <a:spcPct val="0"/>
+                        </a:spcAft>
+                      </a:pPr>
+                      <a:r>
+                        <a:rPr lang="en-US" altLang="zh-CN" sz="2500" i="0">
+                          <a:solidFill>
+                            <a:srgbClr val="000000"/>
+                          </a:solidFill>
+                          <a:latin typeface="Times New Roman" panose="02020603050405020304"/>
+                          <a:ea typeface="SimSun" panose="02010600030101010101" pitchFamily="2" charset="-122"/>
+                        </a:rPr>
+                        <a:t>0.0501</a:t>
+                      </a:r>
+                      <a:endParaRPr lang="en-US" altLang="zh-CN" sz="2500" i="0">
+                        <a:solidFill>
+                          <a:srgbClr val="000000"/>
+                        </a:solidFill>
+                        <a:latin typeface="Times New Roman" panose="02020603050405020304"/>
+                        <a:ea typeface="SimSun" panose="02010600030101010101" pitchFamily="2" charset="-122"/>
+                      </a:endParaRPr>
+                    </a:p>
+                  </a:txBody>
+                  <a:tcPr marL="68580" marR="68580" marT="0" marB="0" anchor="ctr" anchorCtr="0"/>
+                </a:tc>
+                <a:tc>
+                  <a:txBody>
+                    <a:bodyPr/>
+                    <a:p>
+                      <a:pPr marL="0" indent="0" algn="ctr" fontAlgn="ctr">
+                        <a:spcBef>
+                          <a:spcPct val="0"/>
+                        </a:spcBef>
+                        <a:spcAft>
+                          <a:spcPct val="0"/>
+                        </a:spcAft>
+                      </a:pPr>
+                      <a:r>
+                        <a:rPr lang="en-US" altLang="zh-CN" sz="2500" i="0">
+                          <a:solidFill>
+                            <a:srgbClr val="000000"/>
+                          </a:solidFill>
+                          <a:latin typeface="Times New Roman" panose="02020603050405020304"/>
+                          <a:ea typeface="SimSun" panose="02010600030101010101" pitchFamily="2" charset="-122"/>
+                        </a:rPr>
+                        <a:t>0.1244</a:t>
+                      </a:r>
+                      <a:endParaRPr lang="en-US" altLang="zh-CN" sz="2500" i="0">
+                        <a:solidFill>
+                          <a:srgbClr val="000000"/>
+                        </a:solidFill>
+                        <a:latin typeface="Times New Roman" panose="02020603050405020304"/>
+                        <a:ea typeface="SimSun" panose="02010600030101010101" pitchFamily="2" charset="-122"/>
+                      </a:endParaRPr>
+                    </a:p>
+                  </a:txBody>
+                  <a:tcPr marL="68580" marR="68580" marT="0" marB="0" anchor="ctr" anchorCtr="0"/>
+                </a:tc>
+                <a:tc>
+                  <a:txBody>
+                    <a:bodyPr/>
+                    <a:p>
+                      <a:pPr marL="0" indent="0" algn="ctr" fontAlgn="ctr">
+                        <a:spcBef>
+                          <a:spcPct val="0"/>
+                        </a:spcBef>
+                        <a:spcAft>
+                          <a:spcPct val="0"/>
+                        </a:spcAft>
+                      </a:pPr>
+                      <a:r>
+                        <a:rPr lang="en-US" altLang="zh-CN" sz="2500" i="0">
+                          <a:solidFill>
+                            <a:srgbClr val="000000"/>
+                          </a:solidFill>
+                          <a:latin typeface="Times New Roman" panose="02020603050405020304"/>
+                          <a:ea typeface="SimSun" panose="02010600030101010101" pitchFamily="2" charset="-122"/>
+                        </a:rPr>
+                        <a:t>0.137</a:t>
+                      </a:r>
+                      <a:endParaRPr lang="en-US" altLang="zh-CN" sz="2500" i="0">
+                        <a:solidFill>
+                          <a:srgbClr val="000000"/>
+                        </a:solidFill>
+                        <a:latin typeface="Times New Roman" panose="02020603050405020304"/>
+                        <a:ea typeface="SimSun" panose="02010600030101010101" pitchFamily="2" charset="-122"/>
+                      </a:endParaRPr>
+                    </a:p>
+                  </a:txBody>
+                  <a:tcPr marL="68580" marR="68580" marT="0" marB="0" anchor="ctr" anchorCtr="0"/>
+                </a:tc>
+                <a:tc>
+                  <a:txBody>
+                    <a:bodyPr/>
+                    <a:p>
+                      <a:pPr marL="0" indent="0" algn="ctr" fontAlgn="ctr">
+                        <a:spcBef>
+                          <a:spcPct val="0"/>
+                        </a:spcBef>
+                        <a:spcAft>
+                          <a:spcPct val="0"/>
+                        </a:spcAft>
+                      </a:pPr>
+                      <a:r>
+                        <a:rPr lang="en-US" altLang="zh-CN" sz="2500" i="0">
+                          <a:solidFill>
+                            <a:srgbClr val="000000"/>
+                          </a:solidFill>
+                          <a:latin typeface="Times New Roman" panose="02020603050405020304"/>
+                          <a:ea typeface="SimSun" panose="02010600030101010101" pitchFamily="2" charset="-122"/>
+                        </a:rPr>
+                        <a:t>132.93</a:t>
+                      </a:r>
+                      <a:endParaRPr lang="en-US" altLang="zh-CN" sz="2500" i="0">
+                        <a:solidFill>
+                          <a:srgbClr val="000000"/>
+                        </a:solidFill>
+                        <a:latin typeface="Times New Roman" panose="02020603050405020304"/>
+                        <a:ea typeface="SimSun" panose="02010600030101010101" pitchFamily="2" charset="-122"/>
+                      </a:endParaRPr>
+                    </a:p>
+                  </a:txBody>
+                  <a:tcPr marL="68580" marR="68580" marT="0" marB="0" anchor="ctr" anchorCtr="0"/>
+                </a:tc>
+              </a:tr>
+              <a:tr h="701675">
+                <a:tc>
+                  <a:txBody>
+                    <a:bodyPr/>
+                    <a:p>
+                      <a:pPr marL="0" indent="0" algn="l" fontAlgn="ctr">
+                        <a:spcBef>
+                          <a:spcPct val="0"/>
+                        </a:spcBef>
+                        <a:spcAft>
+                          <a:spcPct val="0"/>
+                        </a:spcAft>
+                      </a:pPr>
+                      <a:r>
+                        <a:rPr lang="en-US" altLang="zh-CN" sz="2000" i="0">
+                          <a:solidFill>
+                            <a:schemeClr val="accent1">
+                              <a:lumMod val="75000"/>
+                            </a:schemeClr>
+                          </a:solidFill>
+                          <a:latin typeface="Times New Roman" panose="02020603050405020304"/>
+                          <a:ea typeface="SimSun" panose="02010600030101010101" pitchFamily="2" charset="-122"/>
+                        </a:rPr>
+                        <a:t>SVR</a:t>
+                      </a:r>
+                      <a:endParaRPr lang="en-US" altLang="zh-CN" sz="2000" i="0">
+                        <a:solidFill>
+                          <a:schemeClr val="accent1">
+                            <a:lumMod val="75000"/>
+                          </a:schemeClr>
+                        </a:solidFill>
+                        <a:latin typeface="Times New Roman" panose="02020603050405020304"/>
+                        <a:ea typeface="SimSun" panose="02010600030101010101" pitchFamily="2" charset="-122"/>
+                      </a:endParaRPr>
+                    </a:p>
+                  </a:txBody>
+                  <a:tcPr marL="68580" marR="68580" marT="0" marB="0" anchor="ctr" anchorCtr="0"/>
+                </a:tc>
+                <a:tc>
+                  <a:txBody>
+                    <a:bodyPr/>
+                    <a:p>
+                      <a:pPr marL="0" indent="0" algn="ctr" fontAlgn="ctr">
+                        <a:spcBef>
+                          <a:spcPct val="0"/>
+                        </a:spcBef>
+                        <a:spcAft>
+                          <a:spcPct val="0"/>
+                        </a:spcAft>
+                      </a:pPr>
+                      <a:r>
+                        <a:rPr lang="en-US" altLang="zh-CN" sz="2500" i="0">
+                          <a:solidFill>
+                            <a:srgbClr val="000000"/>
+                          </a:solidFill>
+                          <a:latin typeface="Times New Roman" panose="02020603050405020304"/>
+                          <a:ea typeface="SimSun" panose="02010600030101010101" pitchFamily="2" charset="-122"/>
+                        </a:rPr>
+                        <a:t>0.7598</a:t>
+                      </a:r>
+                      <a:endParaRPr lang="en-US" altLang="zh-CN" sz="2500" i="0">
+                        <a:solidFill>
+                          <a:srgbClr val="000000"/>
+                        </a:solidFill>
+                        <a:latin typeface="Times New Roman" panose="02020603050405020304"/>
+                        <a:ea typeface="SimSun" panose="02010600030101010101" pitchFamily="2" charset="-122"/>
+                      </a:endParaRPr>
+                    </a:p>
+                  </a:txBody>
+                  <a:tcPr marL="68580" marR="68580" marT="0" marB="0" anchor="ctr" anchorCtr="0"/>
+                </a:tc>
+                <a:tc>
+                  <a:txBody>
+                    <a:bodyPr/>
+                    <a:p>
+                      <a:pPr marL="0" indent="0" algn="ctr" fontAlgn="ctr">
+                        <a:spcBef>
+                          <a:spcPct val="0"/>
+                        </a:spcBef>
+                        <a:spcAft>
+                          <a:spcPct val="0"/>
+                        </a:spcAft>
+                      </a:pPr>
+                      <a:r>
+                        <a:rPr lang="en-US" altLang="zh-CN" sz="2500" i="0">
+                          <a:solidFill>
+                            <a:srgbClr val="000000"/>
+                          </a:solidFill>
+                          <a:latin typeface="Times New Roman" panose="02020603050405020304"/>
+                          <a:ea typeface="SimSun" panose="02010600030101010101" pitchFamily="2" charset="-122"/>
+                        </a:rPr>
+                        <a:t>0.7563</a:t>
+                      </a:r>
+                      <a:endParaRPr lang="en-US" altLang="zh-CN" sz="2500" i="0">
+                        <a:solidFill>
+                          <a:srgbClr val="000000"/>
+                        </a:solidFill>
+                        <a:latin typeface="Times New Roman" panose="02020603050405020304"/>
+                        <a:ea typeface="SimSun" panose="02010600030101010101" pitchFamily="2" charset="-122"/>
+                      </a:endParaRPr>
+                    </a:p>
+                  </a:txBody>
+                  <a:tcPr marL="68580" marR="68580" marT="0" marB="0" anchor="ctr" anchorCtr="0"/>
+                </a:tc>
+                <a:tc>
+                  <a:txBody>
+                    <a:bodyPr/>
+                    <a:p>
+                      <a:pPr marL="0" indent="0" algn="ctr" fontAlgn="ctr">
+                        <a:spcBef>
+                          <a:spcPct val="0"/>
+                        </a:spcBef>
+                        <a:spcAft>
+                          <a:spcPct val="0"/>
+                        </a:spcAft>
+                      </a:pPr>
+                      <a:r>
+                        <a:rPr lang="en-US" altLang="zh-CN" sz="2500" i="0">
+                          <a:solidFill>
+                            <a:srgbClr val="000000"/>
+                          </a:solidFill>
+                          <a:latin typeface="Times New Roman" panose="02020603050405020304"/>
+                          <a:ea typeface="SimSun" panose="02010600030101010101" pitchFamily="2" charset="-122"/>
+                        </a:rPr>
+                        <a:t>0.0788</a:t>
+                      </a:r>
+                      <a:endParaRPr lang="en-US" altLang="zh-CN" sz="2500" i="0">
+                        <a:solidFill>
+                          <a:srgbClr val="000000"/>
+                        </a:solidFill>
+                        <a:latin typeface="Times New Roman" panose="02020603050405020304"/>
+                        <a:ea typeface="SimSun" panose="02010600030101010101" pitchFamily="2" charset="-122"/>
+                      </a:endParaRPr>
+                    </a:p>
+                  </a:txBody>
+                  <a:tcPr marL="68580" marR="68580" marT="0" marB="0" anchor="ctr" anchorCtr="0"/>
+                </a:tc>
+                <a:tc>
+                  <a:txBody>
+                    <a:bodyPr/>
+                    <a:p>
+                      <a:pPr marL="0" indent="0" algn="ctr" fontAlgn="ctr">
+                        <a:spcBef>
+                          <a:spcPct val="0"/>
+                        </a:spcBef>
+                        <a:spcAft>
+                          <a:spcPct val="0"/>
+                        </a:spcAft>
+                      </a:pPr>
+                      <a:r>
+                        <a:rPr lang="en-US" altLang="zh-CN" sz="2500" i="0">
+                          <a:solidFill>
+                            <a:srgbClr val="000000"/>
+                          </a:solidFill>
+                          <a:latin typeface="Times New Roman" panose="02020603050405020304"/>
+                          <a:ea typeface="SimSun" panose="02010600030101010101" pitchFamily="2" charset="-122"/>
+                        </a:rPr>
+                        <a:t>0.0648</a:t>
+                      </a:r>
+                      <a:endParaRPr lang="en-US" altLang="zh-CN" sz="2500" i="0">
+                        <a:solidFill>
+                          <a:srgbClr val="000000"/>
+                        </a:solidFill>
+                        <a:latin typeface="Times New Roman" panose="02020603050405020304"/>
+                        <a:ea typeface="SimSun" panose="02010600030101010101" pitchFamily="2" charset="-122"/>
+                      </a:endParaRPr>
+                    </a:p>
+                  </a:txBody>
+                  <a:tcPr marL="68580" marR="68580" marT="0" marB="0" anchor="ctr" anchorCtr="0"/>
+                </a:tc>
+                <a:tc>
+                  <a:txBody>
+                    <a:bodyPr/>
+                    <a:p>
+                      <a:pPr marL="0" indent="0" algn="ctr" fontAlgn="ctr">
+                        <a:spcBef>
+                          <a:spcPct val="0"/>
+                        </a:spcBef>
+                        <a:spcAft>
+                          <a:spcPct val="0"/>
+                        </a:spcAft>
+                      </a:pPr>
+                      <a:r>
+                        <a:rPr lang="en-US" altLang="zh-CN" sz="2500" i="0">
+                          <a:solidFill>
+                            <a:srgbClr val="000000"/>
+                          </a:solidFill>
+                          <a:latin typeface="Times New Roman" panose="02020603050405020304"/>
+                          <a:ea typeface="SimSun" panose="02010600030101010101" pitchFamily="2" charset="-122"/>
+                        </a:rPr>
+                        <a:t>-0.0034</a:t>
+                      </a:r>
+                      <a:endParaRPr lang="en-US" altLang="zh-CN" sz="2500" i="0">
+                        <a:solidFill>
+                          <a:srgbClr val="000000"/>
+                        </a:solidFill>
+                        <a:latin typeface="Times New Roman" panose="02020603050405020304"/>
+                        <a:ea typeface="SimSun" panose="02010600030101010101" pitchFamily="2" charset="-122"/>
+                      </a:endParaRPr>
+                    </a:p>
+                  </a:txBody>
+                  <a:tcPr marL="68580" marR="68580" marT="0" marB="0" anchor="ctr" anchorCtr="0"/>
+                </a:tc>
+                <a:tc>
+                  <a:txBody>
+                    <a:bodyPr/>
+                    <a:p>
+                      <a:pPr marL="0" indent="0" algn="ctr" fontAlgn="ctr">
+                        <a:spcBef>
+                          <a:spcPct val="0"/>
+                        </a:spcBef>
+                        <a:spcAft>
+                          <a:spcPct val="0"/>
+                        </a:spcAft>
+                      </a:pPr>
+                      <a:r>
+                        <a:rPr lang="en-US" altLang="zh-CN" sz="2500" i="0">
+                          <a:solidFill>
+                            <a:srgbClr val="000000"/>
+                          </a:solidFill>
+                          <a:latin typeface="Times New Roman" panose="02020603050405020304"/>
+                          <a:ea typeface="SimSun" panose="02010600030101010101" pitchFamily="2" charset="-122"/>
+                        </a:rPr>
+                        <a:t>0.038</a:t>
+                      </a:r>
+                      <a:endParaRPr lang="en-US" altLang="zh-CN" sz="2500" i="0">
+                        <a:solidFill>
+                          <a:srgbClr val="000000"/>
+                        </a:solidFill>
+                        <a:latin typeface="Times New Roman" panose="02020603050405020304"/>
+                        <a:ea typeface="SimSun" panose="02010600030101010101" pitchFamily="2" charset="-122"/>
+                      </a:endParaRPr>
+                    </a:p>
+                  </a:txBody>
+                  <a:tcPr marL="68580" marR="68580" marT="0" marB="0" anchor="ctr" anchorCtr="0"/>
+                </a:tc>
+                <a:tc>
+                  <a:txBody>
+                    <a:bodyPr/>
+                    <a:p>
+                      <a:pPr marL="0" indent="0" algn="ctr" fontAlgn="ctr">
+                        <a:spcBef>
+                          <a:spcPct val="0"/>
+                        </a:spcBef>
+                        <a:spcAft>
+                          <a:spcPct val="0"/>
+                        </a:spcAft>
+                      </a:pPr>
+                      <a:r>
+                        <a:rPr lang="en-US" altLang="zh-CN" sz="2500" i="0">
+                          <a:solidFill>
+                            <a:srgbClr val="000000"/>
+                          </a:solidFill>
+                          <a:latin typeface="Times New Roman" panose="02020603050405020304"/>
+                          <a:ea typeface="SimSun" panose="02010600030101010101" pitchFamily="2" charset="-122"/>
+                        </a:rPr>
+                        <a:t>5.4</a:t>
+                      </a:r>
+                      <a:endParaRPr lang="en-US" altLang="zh-CN" sz="2500" i="0">
+                        <a:solidFill>
+                          <a:srgbClr val="000000"/>
+                        </a:solidFill>
+                        <a:latin typeface="Times New Roman" panose="02020603050405020304"/>
+                        <a:ea typeface="SimSun" panose="02010600030101010101" pitchFamily="2" charset="-122"/>
+                      </a:endParaRPr>
+                    </a:p>
+                  </a:txBody>
+                  <a:tcPr marL="68580" marR="68580" marT="0" marB="0" anchor="ctr" anchorCtr="0"/>
+                </a:tc>
+              </a:tr>
+              <a:tr h="701675">
+                <a:tc>
+                  <a:txBody>
+                    <a:bodyPr/>
+                    <a:p>
+                      <a:pPr marL="0" indent="0" algn="l" fontAlgn="ctr">
+                        <a:spcBef>
+                          <a:spcPct val="0"/>
+                        </a:spcBef>
+                        <a:spcAft>
+                          <a:spcPct val="0"/>
+                        </a:spcAft>
+                      </a:pPr>
+                      <a:r>
+                        <a:rPr lang="en-US" altLang="zh-CN" sz="2000" i="0">
+                          <a:solidFill>
+                            <a:schemeClr val="accent1">
+                              <a:lumMod val="75000"/>
+                            </a:schemeClr>
+                          </a:solidFill>
+                          <a:latin typeface="Times New Roman" panose="02020603050405020304"/>
+                          <a:ea typeface="SimSun" panose="02010600030101010101" pitchFamily="2" charset="-122"/>
+                        </a:rPr>
+                        <a:t>KNN</a:t>
+                      </a:r>
+                      <a:endParaRPr lang="en-US" altLang="zh-CN" sz="2000" i="0">
+                        <a:solidFill>
+                          <a:schemeClr val="accent1">
+                            <a:lumMod val="75000"/>
+                          </a:schemeClr>
+                        </a:solidFill>
+                        <a:latin typeface="Times New Roman" panose="02020603050405020304"/>
+                        <a:ea typeface="SimSun" panose="02010600030101010101" pitchFamily="2" charset="-122"/>
+                      </a:endParaRPr>
+                    </a:p>
+                  </a:txBody>
+                  <a:tcPr marL="68580" marR="68580" marT="0" marB="0" anchor="ctr" anchorCtr="0"/>
+                </a:tc>
+                <a:tc>
+                  <a:txBody>
+                    <a:bodyPr/>
+                    <a:p>
+                      <a:pPr marL="0" indent="0" algn="ctr" fontAlgn="ctr">
+                        <a:spcBef>
+                          <a:spcPct val="0"/>
+                        </a:spcBef>
+                        <a:spcAft>
+                          <a:spcPct val="0"/>
+                        </a:spcAft>
+                      </a:pPr>
+                      <a:r>
+                        <a:rPr lang="en-US" altLang="zh-CN" sz="2500" i="0">
+                          <a:solidFill>
+                            <a:srgbClr val="000000"/>
+                          </a:solidFill>
+                          <a:latin typeface="Times New Roman" panose="02020603050405020304"/>
+                          <a:ea typeface="SimSun" panose="02010600030101010101" pitchFamily="2" charset="-122"/>
+                        </a:rPr>
+                        <a:t>0.756</a:t>
+                      </a:r>
+                      <a:endParaRPr lang="en-US" altLang="zh-CN" sz="2500" i="0">
+                        <a:solidFill>
+                          <a:srgbClr val="000000"/>
+                        </a:solidFill>
+                        <a:latin typeface="Times New Roman" panose="02020603050405020304"/>
+                        <a:ea typeface="SimSun" panose="02010600030101010101" pitchFamily="2" charset="-122"/>
+                      </a:endParaRPr>
+                    </a:p>
+                  </a:txBody>
+                  <a:tcPr marL="68580" marR="68580" marT="0" marB="0" anchor="ctr" anchorCtr="0"/>
+                </a:tc>
+                <a:tc>
+                  <a:txBody>
+                    <a:bodyPr/>
+                    <a:p>
+                      <a:pPr marL="0" indent="0" algn="ctr" fontAlgn="ctr">
+                        <a:spcBef>
+                          <a:spcPct val="0"/>
+                        </a:spcBef>
+                        <a:spcAft>
+                          <a:spcPct val="0"/>
+                        </a:spcAft>
+                      </a:pPr>
+                      <a:r>
+                        <a:rPr lang="en-US" altLang="zh-CN" sz="2500" i="0">
+                          <a:solidFill>
+                            <a:srgbClr val="000000"/>
+                          </a:solidFill>
+                          <a:latin typeface="Times New Roman" panose="02020603050405020304"/>
+                          <a:ea typeface="SimSun" panose="02010600030101010101" pitchFamily="2" charset="-122"/>
+                        </a:rPr>
+                        <a:t>0.8309</a:t>
+                      </a:r>
+                      <a:endParaRPr lang="en-US" altLang="zh-CN" sz="2500" i="0">
+                        <a:solidFill>
+                          <a:srgbClr val="000000"/>
+                        </a:solidFill>
+                        <a:latin typeface="Times New Roman" panose="02020603050405020304"/>
+                        <a:ea typeface="SimSun" panose="02010600030101010101" pitchFamily="2" charset="-122"/>
+                      </a:endParaRPr>
+                    </a:p>
+                  </a:txBody>
+                  <a:tcPr marL="68580" marR="68580" marT="0" marB="0" anchor="ctr" anchorCtr="0"/>
+                </a:tc>
+                <a:tc>
+                  <a:txBody>
+                    <a:bodyPr/>
+                    <a:p>
+                      <a:pPr marL="0" indent="0" algn="ctr" fontAlgn="ctr">
+                        <a:spcBef>
+                          <a:spcPct val="0"/>
+                        </a:spcBef>
+                        <a:spcAft>
+                          <a:spcPct val="0"/>
+                        </a:spcAft>
+                      </a:pPr>
+                      <a:r>
+                        <a:rPr lang="en-US" altLang="zh-CN" sz="2500" i="0">
+                          <a:solidFill>
+                            <a:srgbClr val="000000"/>
+                          </a:solidFill>
+                          <a:latin typeface="Times New Roman" panose="02020603050405020304"/>
+                          <a:ea typeface="SimSun" panose="02010600030101010101" pitchFamily="2" charset="-122"/>
+                        </a:rPr>
+                        <a:t>0.0794</a:t>
+                      </a:r>
+                      <a:endParaRPr lang="en-US" altLang="zh-CN" sz="2500" i="0">
+                        <a:solidFill>
+                          <a:srgbClr val="000000"/>
+                        </a:solidFill>
+                        <a:latin typeface="Times New Roman" panose="02020603050405020304"/>
+                        <a:ea typeface="SimSun" panose="02010600030101010101" pitchFamily="2" charset="-122"/>
+                      </a:endParaRPr>
+                    </a:p>
+                  </a:txBody>
+                  <a:tcPr marL="68580" marR="68580" marT="0" marB="0" anchor="ctr" anchorCtr="0"/>
+                </a:tc>
+                <a:tc>
+                  <a:txBody>
+                    <a:bodyPr/>
+                    <a:p>
+                      <a:pPr marL="0" indent="0" algn="ctr" fontAlgn="ctr">
+                        <a:spcBef>
+                          <a:spcPct val="0"/>
+                        </a:spcBef>
+                        <a:spcAft>
+                          <a:spcPct val="0"/>
+                        </a:spcAft>
+                      </a:pPr>
+                      <a:r>
+                        <a:rPr lang="en-US" altLang="zh-CN" sz="2500" i="0">
+                          <a:solidFill>
+                            <a:srgbClr val="000000"/>
+                          </a:solidFill>
+                          <a:latin typeface="Times New Roman" panose="02020603050405020304"/>
+                          <a:ea typeface="SimSun" panose="02010600030101010101" pitchFamily="2" charset="-122"/>
+                        </a:rPr>
+                        <a:t>0.0542</a:t>
+                      </a:r>
+                      <a:endParaRPr lang="en-US" altLang="zh-CN" sz="2500" i="0">
+                        <a:solidFill>
+                          <a:srgbClr val="000000"/>
+                        </a:solidFill>
+                        <a:latin typeface="Times New Roman" panose="02020603050405020304"/>
+                        <a:ea typeface="SimSun" panose="02010600030101010101" pitchFamily="2" charset="-122"/>
+                      </a:endParaRPr>
+                    </a:p>
+                  </a:txBody>
+                  <a:tcPr marL="68580" marR="68580" marT="0" marB="0" anchor="ctr" anchorCtr="0"/>
+                </a:tc>
+                <a:tc>
+                  <a:txBody>
+                    <a:bodyPr/>
+                    <a:p>
+                      <a:pPr marL="0" indent="0" algn="ctr" fontAlgn="ctr">
+                        <a:spcBef>
+                          <a:spcPct val="0"/>
+                        </a:spcBef>
+                        <a:spcAft>
+                          <a:spcPct val="0"/>
+                        </a:spcAft>
+                      </a:pPr>
+                      <a:r>
+                        <a:rPr lang="en-US" altLang="zh-CN" sz="2500" i="0">
+                          <a:solidFill>
+                            <a:srgbClr val="000000"/>
+                          </a:solidFill>
+                          <a:latin typeface="Times New Roman" panose="02020603050405020304"/>
+                          <a:ea typeface="SimSun" panose="02010600030101010101" pitchFamily="2" charset="-122"/>
+                        </a:rPr>
+                        <a:t>0.0749</a:t>
+                      </a:r>
+                      <a:endParaRPr lang="en-US" altLang="zh-CN" sz="2500" i="0">
+                        <a:solidFill>
+                          <a:srgbClr val="000000"/>
+                        </a:solidFill>
+                        <a:latin typeface="Times New Roman" panose="02020603050405020304"/>
+                        <a:ea typeface="SimSun" panose="02010600030101010101" pitchFamily="2" charset="-122"/>
+                      </a:endParaRPr>
+                    </a:p>
+                  </a:txBody>
+                  <a:tcPr marL="68580" marR="68580" marT="0" marB="0" anchor="ctr" anchorCtr="0"/>
+                </a:tc>
+                <a:tc>
+                  <a:txBody>
+                    <a:bodyPr/>
+                    <a:p>
+                      <a:pPr marL="0" indent="0" algn="ctr" fontAlgn="ctr">
+                        <a:spcBef>
+                          <a:spcPct val="0"/>
+                        </a:spcBef>
+                        <a:spcAft>
+                          <a:spcPct val="0"/>
+                        </a:spcAft>
+                      </a:pPr>
+                      <a:r>
+                        <a:rPr lang="en-US" altLang="zh-CN" sz="2500" i="0">
+                          <a:solidFill>
+                            <a:srgbClr val="000000"/>
+                          </a:solidFill>
+                          <a:latin typeface="Times New Roman" panose="02020603050405020304"/>
+                          <a:ea typeface="SimSun" panose="02010600030101010101" pitchFamily="2" charset="-122"/>
+                        </a:rPr>
+                        <a:t>0.099</a:t>
+                      </a:r>
+                      <a:endParaRPr lang="en-US" altLang="zh-CN" sz="2500" i="0">
+                        <a:solidFill>
+                          <a:srgbClr val="000000"/>
+                        </a:solidFill>
+                        <a:latin typeface="Times New Roman" panose="02020603050405020304"/>
+                        <a:ea typeface="SimSun" panose="02010600030101010101" pitchFamily="2" charset="-122"/>
+                      </a:endParaRPr>
+                    </a:p>
+                  </a:txBody>
+                  <a:tcPr marL="68580" marR="68580" marT="0" marB="0" anchor="ctr" anchorCtr="0"/>
+                </a:tc>
+                <a:tc>
+                  <a:txBody>
+                    <a:bodyPr/>
+                    <a:p>
+                      <a:pPr marL="0" indent="0" algn="ctr" fontAlgn="ctr">
+                        <a:spcBef>
+                          <a:spcPct val="0"/>
+                        </a:spcBef>
+                        <a:spcAft>
+                          <a:spcPct val="0"/>
+                        </a:spcAft>
+                      </a:pPr>
+                      <a:r>
+                        <a:rPr lang="en-US" altLang="zh-CN" sz="2500" i="0">
+                          <a:solidFill>
+                            <a:srgbClr val="000000"/>
+                          </a:solidFill>
+                          <a:latin typeface="Times New Roman" panose="02020603050405020304"/>
+                          <a:ea typeface="SimSun" panose="02010600030101010101" pitchFamily="2" charset="-122"/>
+                        </a:rPr>
+                        <a:t>43.43</a:t>
+                      </a:r>
+                      <a:endParaRPr lang="en-US" altLang="zh-CN" sz="2500" i="0">
+                        <a:solidFill>
+                          <a:srgbClr val="000000"/>
+                        </a:solidFill>
+                        <a:latin typeface="Times New Roman" panose="02020603050405020304"/>
+                        <a:ea typeface="SimSun" panose="02010600030101010101" pitchFamily="2" charset="-122"/>
+                      </a:endParaRPr>
+                    </a:p>
+                  </a:txBody>
+                  <a:tcPr marL="68580" marR="68580" marT="0" marB="0" anchor="ctr" anchorCtr="0"/>
+                </a:tc>
+              </a:tr>
+            </a:tbl>
+          </a:graphicData>
+        </a:graphic>
+      </p:graphicFrame>
     </p:spTree>
   </p:cSld>
   <p:clrMapOvr>
@@ -17532,6 +17179,13 @@
 </p:sld>
 </file>
 
+<file path=ppt/tags/tag1.xml><?xml version="1.0" encoding="utf-8"?>
+<p:tagLst xmlns:p="http://schemas.openxmlformats.org/presentationml/2006/main">
+  <p:tag name="TABLE_ENDDRAG_ORIGIN_RECT" val="800*331"/>
+  <p:tag name="TABLE_ENDDRAG_RECT" val="63*139*800*331"/>
+</p:tagLst>
+</file>
+
 <file path=ppt/theme/theme1.xml><?xml version="1.0" encoding="utf-8"?>
 <a:theme xmlns:a="http://schemas.openxmlformats.org/drawingml/2006/main" name="Office Theme">
   <a:themeElements>
